--- a/提出物関係/企画書/GC3_前期チーム制作_企画書.pptx
+++ b/提出物関係/企画書/GC3_前期チーム制作_企画書.pptx
@@ -6436,56 +6436,6 @@
       </p:sp>
       <p:pic>
         <p:nvPicPr>
-          <p:cNvPr id="6" name="図 5">
-            <a:extLst>
-              <a:ext uri="{FF2B5EF4-FFF2-40B4-BE49-F238E27FC236}">
-                <a16:creationId xmlns:a16="http://schemas.microsoft.com/office/drawing/2014/main" id="{AADE38D6-669F-0D43-5EF0-EF5433371884}"/>
-              </a:ext>
-            </a:extLst>
-          </p:cNvPr>
-          <p:cNvPicPr>
-            <a:picLocks noChangeAspect="1"/>
-          </p:cNvPicPr>
-          <p:nvPr/>
-        </p:nvPicPr>
-        <p:blipFill>
-          <a:blip r:embed="rId3">
-            <a:extLst>
-              <a:ext uri="{28A0092B-C50C-407E-A947-70E740481C1C}">
-                <a14:useLocalDpi xmlns:a14="http://schemas.microsoft.com/office/drawing/2010/main" val="0"/>
-              </a:ext>
-            </a:extLst>
-          </a:blip>
-          <a:stretch>
-            <a:fillRect/>
-          </a:stretch>
-        </p:blipFill>
-        <p:spPr>
-          <a:xfrm>
-            <a:off x="857073" y="1234834"/>
-            <a:ext cx="4523002" cy="2544189"/>
-          </a:xfrm>
-          <a:prstGeom prst="rect">
-            <a:avLst/>
-          </a:prstGeom>
-          <a:ln w="38100" cap="sq">
-            <a:solidFill>
-              <a:srgbClr val="000000"/>
-            </a:solidFill>
-            <a:prstDash val="solid"/>
-            <a:miter lim="800000"/>
-          </a:ln>
-          <a:effectLst>
-            <a:outerShdw blurRad="50800" dist="38100" dir="2700000" algn="tl" rotWithShape="0">
-              <a:prstClr val="black">
-                <a:alpha val="40000"/>
-              </a:prstClr>
-            </a:outerShdw>
-          </a:effectLst>
-        </p:spPr>
-      </p:pic>
-      <p:pic>
-        <p:nvPicPr>
           <p:cNvPr id="5" name="図 4">
             <a:extLst>
               <a:ext uri="{FF2B5EF4-FFF2-40B4-BE49-F238E27FC236}">
@@ -6513,59 +6463,8 @@
         </p:blipFill>
         <p:spPr>
           <a:xfrm>
-            <a:off x="6624529" y="1234834"/>
-            <a:ext cx="4523002" cy="2544189"/>
-          </a:xfrm>
-          <a:prstGeom prst="rect">
-            <a:avLst/>
-          </a:prstGeom>
-          <a:ln w="38100" cap="sq">
-            <a:solidFill>
-              <a:srgbClr val="000000"/>
-            </a:solidFill>
-            <a:prstDash val="solid"/>
-            <a:miter lim="800000"/>
-          </a:ln>
-          <a:effectLst>
-            <a:outerShdw blurRad="50800" dist="38100" dir="2700000" algn="tl" rotWithShape="0">
-              <a:prstClr val="black">
-                <a:alpha val="40000"/>
-              </a:prstClr>
-            </a:outerShdw>
-          </a:effectLst>
-        </p:spPr>
-      </p:pic>
-      <p:pic>
-        <p:nvPicPr>
-          <p:cNvPr id="7" name="図 6">
-            <a:extLst>
-              <a:ext uri="{FF2B5EF4-FFF2-40B4-BE49-F238E27FC236}">
-                <a16:creationId xmlns:a16="http://schemas.microsoft.com/office/drawing/2014/main" id="{8C4928C5-6CDF-DFCB-0BA8-8C82ADC08FE9}"/>
-              </a:ext>
-            </a:extLst>
-          </p:cNvPr>
-          <p:cNvPicPr>
-            <a:picLocks noChangeAspect="1"/>
-          </p:cNvPicPr>
-          <p:nvPr/>
-        </p:nvPicPr>
-        <p:blipFill>
-          <a:blip r:embed="rId3">
-            <a:extLst>
-              <a:ext uri="{28A0092B-C50C-407E-A947-70E740481C1C}">
-                <a14:useLocalDpi xmlns:a14="http://schemas.microsoft.com/office/drawing/2010/main" val="0"/>
-              </a:ext>
-            </a:extLst>
-          </a:blip>
-          <a:srcRect l="38337" t="34689" r="31883" b="35532"/>
-          <a:stretch>
-            <a:fillRect/>
-          </a:stretch>
-        </p:blipFill>
-        <p:spPr>
-          <a:xfrm>
-            <a:off x="3498087" y="3998763"/>
-            <a:ext cx="4926467" cy="2771138"/>
+            <a:off x="1786919" y="1234834"/>
+            <a:ext cx="9360612" cy="5265345"/>
           </a:xfrm>
           <a:prstGeom prst="rect">
             <a:avLst/>

--- a/提出物関係/企画書/GC3_前期チーム制作_企画書.pptx
+++ b/提出物関係/企画書/GC3_前期チーム制作_企画書.pptx
@@ -5,7 +5,7 @@
     <p:sldMasterId id="2147483648" r:id="rId1"/>
   </p:sldMasterIdLst>
   <p:notesMasterIdLst>
-    <p:notesMasterId r:id="rId11"/>
+    <p:notesMasterId r:id="rId12"/>
   </p:notesMasterIdLst>
   <p:sldIdLst>
     <p:sldId id="256" r:id="rId2"/>
@@ -16,7 +16,8 @@
     <p:sldId id="263" r:id="rId7"/>
     <p:sldId id="264" r:id="rId8"/>
     <p:sldId id="260" r:id="rId9"/>
-    <p:sldId id="261" r:id="rId10"/>
+    <p:sldId id="265" r:id="rId10"/>
+    <p:sldId id="261" r:id="rId11"/>
   </p:sldIdLst>
   <p:sldSz cx="12192000" cy="6858000"/>
   <p:notesSz cx="6858000" cy="9144000"/>
@@ -205,7 +206,7 @@
           <a:p>
             <a:fld id="{9A46BB13-4E02-47D6-B51B-300407545168}" type="datetimeFigureOut">
               <a:rPr kumimoji="1" lang="ja-JP" altLang="en-US" smtClean="0"/>
-              <a:t>2026/4/24</a:t>
+              <a:t>2026/4/27</a:t>
             </a:fld>
             <a:endParaRPr kumimoji="1" lang="ja-JP" altLang="en-US"/>
           </a:p>
@@ -548,17 +549,7 @@
           <a:bodyPr/>
           <a:lstStyle/>
           <a:p>
-            <a:r>
-              <a:rPr kumimoji="1" lang="ja-JP" altLang="en-US" dirty="0"/>
-              <a:t>サボりとタスクのバーは、特定の場所でないと見れない</a:t>
-            </a:r>
-            <a:endParaRPr kumimoji="1" lang="en-US" altLang="ja-JP" dirty="0"/>
-          </a:p>
-          <a:p>
-            <a:r>
-              <a:rPr kumimoji="1" lang="ja-JP" altLang="en-US" dirty="0"/>
-              <a:t>という風にする</a:t>
-            </a:r>
+            <a:endParaRPr kumimoji="1" lang="ja-JP" altLang="en-US" dirty="0"/>
           </a:p>
         </p:txBody>
       </p:sp>
@@ -579,7 +570,7 @@
           <a:p>
             <a:fld id="{ABC71CF5-8D7F-4CEC-A79C-4697D4E61D38}" type="slidenum">
               <a:rPr kumimoji="1" lang="ja-JP" altLang="en-US" smtClean="0"/>
-              <a:t>5</a:t>
+              <a:t>2</a:t>
             </a:fld>
             <a:endParaRPr kumimoji="1" lang="ja-JP" altLang="en-US"/>
           </a:p>
@@ -588,7 +579,7 @@
     </p:spTree>
     <p:extLst>
       <p:ext uri="{BB962C8B-B14F-4D97-AF65-F5344CB8AC3E}">
-        <p14:creationId xmlns:p14="http://schemas.microsoft.com/office/powerpoint/2010/main" val="3919512119"/>
+        <p14:creationId xmlns:p14="http://schemas.microsoft.com/office/powerpoint/2010/main" val="1181656977"/>
       </p:ext>
     </p:extLst>
   </p:cSld>
@@ -644,7 +635,14 @@
           <a:p>
             <a:r>
               <a:rPr kumimoji="1" lang="ja-JP" altLang="en-US" dirty="0"/>
-              <a:t>どれにするか</a:t>
+              <a:t>サボりとタスクのバーは、特定の場所でないと見れない</a:t>
+            </a:r>
+            <a:endParaRPr kumimoji="1" lang="en-US" altLang="ja-JP" dirty="0"/>
+          </a:p>
+          <a:p>
+            <a:r>
+              <a:rPr kumimoji="1" lang="ja-JP" altLang="en-US" dirty="0"/>
+              <a:t>という風にする</a:t>
             </a:r>
           </a:p>
         </p:txBody>
@@ -666,7 +664,7 @@
           <a:p>
             <a:fld id="{ABC71CF5-8D7F-4CEC-A79C-4697D4E61D38}" type="slidenum">
               <a:rPr kumimoji="1" lang="ja-JP" altLang="en-US" smtClean="0"/>
-              <a:t>6</a:t>
+              <a:t>5</a:t>
             </a:fld>
             <a:endParaRPr kumimoji="1" lang="ja-JP" altLang="en-US"/>
           </a:p>
@@ -675,7 +673,7 @@
     </p:spTree>
     <p:extLst>
       <p:ext uri="{BB962C8B-B14F-4D97-AF65-F5344CB8AC3E}">
-        <p14:creationId xmlns:p14="http://schemas.microsoft.com/office/powerpoint/2010/main" val="1625791664"/>
+        <p14:creationId xmlns:p14="http://schemas.microsoft.com/office/powerpoint/2010/main" val="3919512119"/>
       </p:ext>
     </p:extLst>
   </p:cSld>
@@ -729,10 +727,7 @@
           <a:bodyPr/>
           <a:lstStyle/>
           <a:p>
-            <a:r>
-              <a:rPr kumimoji="1" lang="ja-JP" altLang="en-US" dirty="0"/>
-              <a:t>＜展開＞の「規模」とは何かを具体的に</a:t>
-            </a:r>
+            <a:endParaRPr kumimoji="1" lang="ja-JP" altLang="en-US" dirty="0"/>
           </a:p>
         </p:txBody>
       </p:sp>
@@ -753,7 +748,7 @@
           <a:p>
             <a:fld id="{ABC71CF5-8D7F-4CEC-A79C-4697D4E61D38}" type="slidenum">
               <a:rPr kumimoji="1" lang="ja-JP" altLang="en-US" smtClean="0"/>
-              <a:t>8</a:t>
+              <a:t>6</a:t>
             </a:fld>
             <a:endParaRPr kumimoji="1" lang="ja-JP" altLang="en-US"/>
           </a:p>
@@ -762,7 +757,7 @@
     </p:spTree>
     <p:extLst>
       <p:ext uri="{BB962C8B-B14F-4D97-AF65-F5344CB8AC3E}">
-        <p14:creationId xmlns:p14="http://schemas.microsoft.com/office/powerpoint/2010/main" val="114342458"/>
+        <p14:creationId xmlns:p14="http://schemas.microsoft.com/office/powerpoint/2010/main" val="1625791664"/>
       </p:ext>
     </p:extLst>
   </p:cSld>
@@ -818,14 +813,7 @@
           <a:p>
             <a:r>
               <a:rPr kumimoji="1" lang="ja-JP" altLang="en-US" dirty="0"/>
-              <a:t>アピールポイントは、このゲームはどう楽しいかを</a:t>
-            </a:r>
-            <a:endParaRPr kumimoji="1" lang="en-US" altLang="ja-JP" dirty="0"/>
-          </a:p>
-          <a:p>
-            <a:r>
-              <a:rPr kumimoji="1" lang="ja-JP" altLang="en-US" dirty="0"/>
-              <a:t>技術的アピールではない</a:t>
+              <a:t>＜展開＞の「規模」とは何かを具体的に</a:t>
             </a:r>
           </a:p>
         </p:txBody>
@@ -847,7 +835,101 @@
           <a:p>
             <a:fld id="{ABC71CF5-8D7F-4CEC-A79C-4697D4E61D38}" type="slidenum">
               <a:rPr kumimoji="1" lang="ja-JP" altLang="en-US" smtClean="0"/>
-              <a:t>9</a:t>
+              <a:t>8</a:t>
+            </a:fld>
+            <a:endParaRPr kumimoji="1" lang="ja-JP" altLang="en-US"/>
+          </a:p>
+        </p:txBody>
+      </p:sp>
+    </p:spTree>
+    <p:extLst>
+      <p:ext uri="{BB962C8B-B14F-4D97-AF65-F5344CB8AC3E}">
+        <p14:creationId xmlns:p14="http://schemas.microsoft.com/office/powerpoint/2010/main" val="114342458"/>
+      </p:ext>
+    </p:extLst>
+  </p:cSld>
+  <p:clrMapOvr>
+    <a:masterClrMapping/>
+  </p:clrMapOvr>
+</p:notes>
+</file>
+
+<file path=ppt/notesSlides/notesSlide5.xml><?xml version="1.0" encoding="utf-8"?>
+<p:notes xmlns:a="http://schemas.openxmlformats.org/drawingml/2006/main" xmlns:r="http://schemas.openxmlformats.org/officeDocument/2006/relationships" xmlns:p="http://schemas.openxmlformats.org/presentationml/2006/main">
+  <p:cSld>
+    <p:spTree>
+      <p:nvGrpSpPr>
+        <p:cNvPr id="1" name=""/>
+        <p:cNvGrpSpPr/>
+        <p:nvPr/>
+      </p:nvGrpSpPr>
+      <p:grpSpPr>
+        <a:xfrm>
+          <a:off x="0" y="0"/>
+          <a:ext cx="0" cy="0"/>
+          <a:chOff x="0" y="0"/>
+          <a:chExt cx="0" cy="0"/>
+        </a:xfrm>
+      </p:grpSpPr>
+      <p:sp>
+        <p:nvSpPr>
+          <p:cNvPr id="2" name="スライド イメージ プレースホルダー 1"/>
+          <p:cNvSpPr>
+            <a:spLocks noGrp="1" noRot="1" noChangeAspect="1"/>
+          </p:cNvSpPr>
+          <p:nvPr>
+            <p:ph type="sldImg"/>
+          </p:nvPr>
+        </p:nvSpPr>
+        <p:spPr/>
+      </p:sp>
+      <p:sp>
+        <p:nvSpPr>
+          <p:cNvPr id="3" name="ノート プレースホルダー 2"/>
+          <p:cNvSpPr>
+            <a:spLocks noGrp="1"/>
+          </p:cNvSpPr>
+          <p:nvPr>
+            <p:ph type="body" idx="1"/>
+          </p:nvPr>
+        </p:nvSpPr>
+        <p:spPr/>
+        <p:txBody>
+          <a:bodyPr/>
+          <a:lstStyle/>
+          <a:p>
+            <a:r>
+              <a:rPr kumimoji="1" lang="ja-JP" altLang="en-US" dirty="0"/>
+              <a:t>アピールポイントは、このゲームはどう楽しいかを</a:t>
+            </a:r>
+            <a:endParaRPr kumimoji="1" lang="en-US" altLang="ja-JP" dirty="0"/>
+          </a:p>
+          <a:p>
+            <a:r>
+              <a:rPr kumimoji="1" lang="ja-JP" altLang="en-US" dirty="0"/>
+              <a:t>技術的アピールではない</a:t>
+            </a:r>
+          </a:p>
+        </p:txBody>
+      </p:sp>
+      <p:sp>
+        <p:nvSpPr>
+          <p:cNvPr id="4" name="スライド番号プレースホルダー 3"/>
+          <p:cNvSpPr>
+            <a:spLocks noGrp="1"/>
+          </p:cNvSpPr>
+          <p:nvPr>
+            <p:ph type="sldNum" sz="quarter" idx="5"/>
+          </p:nvPr>
+        </p:nvSpPr>
+        <p:spPr/>
+        <p:txBody>
+          <a:bodyPr/>
+          <a:lstStyle/>
+          <a:p>
+            <a:fld id="{ABC71CF5-8D7F-4CEC-A79C-4697D4E61D38}" type="slidenum">
+              <a:rPr kumimoji="1" lang="ja-JP" altLang="en-US" smtClean="0"/>
+              <a:t>10</a:t>
             </a:fld>
             <a:endParaRPr kumimoji="1" lang="ja-JP" altLang="en-US"/>
           </a:p>
@@ -1013,7 +1095,7 @@
           <a:p>
             <a:fld id="{32CF0108-805A-4CD7-BE16-DF43657C0E0F}" type="datetimeFigureOut">
               <a:rPr kumimoji="1" lang="ja-JP" altLang="en-US" smtClean="0"/>
-              <a:t>2026/4/24</a:t>
+              <a:t>2026/4/27</a:t>
             </a:fld>
             <a:endParaRPr kumimoji="1" lang="ja-JP" altLang="en-US"/>
           </a:p>
@@ -1243,7 +1325,7 @@
           <a:p>
             <a:fld id="{32CF0108-805A-4CD7-BE16-DF43657C0E0F}" type="datetimeFigureOut">
               <a:rPr kumimoji="1" lang="ja-JP" altLang="en-US" smtClean="0"/>
-              <a:t>2026/4/24</a:t>
+              <a:t>2026/4/27</a:t>
             </a:fld>
             <a:endParaRPr kumimoji="1" lang="ja-JP" altLang="en-US"/>
           </a:p>
@@ -1483,7 +1565,7 @@
           <a:p>
             <a:fld id="{32CF0108-805A-4CD7-BE16-DF43657C0E0F}" type="datetimeFigureOut">
               <a:rPr kumimoji="1" lang="ja-JP" altLang="en-US" smtClean="0"/>
-              <a:t>2026/4/24</a:t>
+              <a:t>2026/4/27</a:t>
             </a:fld>
             <a:endParaRPr kumimoji="1" lang="ja-JP" altLang="en-US"/>
           </a:p>
@@ -1713,7 +1795,7 @@
           <a:p>
             <a:fld id="{32CF0108-805A-4CD7-BE16-DF43657C0E0F}" type="datetimeFigureOut">
               <a:rPr kumimoji="1" lang="ja-JP" altLang="en-US" smtClean="0"/>
-              <a:t>2026/4/24</a:t>
+              <a:t>2026/4/27</a:t>
             </a:fld>
             <a:endParaRPr kumimoji="1" lang="ja-JP" altLang="en-US"/>
           </a:p>
@@ -1988,7 +2070,7 @@
           <a:p>
             <a:fld id="{32CF0108-805A-4CD7-BE16-DF43657C0E0F}" type="datetimeFigureOut">
               <a:rPr kumimoji="1" lang="ja-JP" altLang="en-US" smtClean="0"/>
-              <a:t>2026/4/24</a:t>
+              <a:t>2026/4/27</a:t>
             </a:fld>
             <a:endParaRPr kumimoji="1" lang="ja-JP" altLang="en-US"/>
           </a:p>
@@ -2317,7 +2399,7 @@
           <a:p>
             <a:fld id="{32CF0108-805A-4CD7-BE16-DF43657C0E0F}" type="datetimeFigureOut">
               <a:rPr kumimoji="1" lang="ja-JP" altLang="en-US" smtClean="0"/>
-              <a:t>2026/4/24</a:t>
+              <a:t>2026/4/27</a:t>
             </a:fld>
             <a:endParaRPr kumimoji="1" lang="ja-JP" altLang="en-US"/>
           </a:p>
@@ -2793,7 +2875,7 @@
           <a:p>
             <a:fld id="{32CF0108-805A-4CD7-BE16-DF43657C0E0F}" type="datetimeFigureOut">
               <a:rPr kumimoji="1" lang="ja-JP" altLang="en-US" smtClean="0"/>
-              <a:t>2026/4/24</a:t>
+              <a:t>2026/4/27</a:t>
             </a:fld>
             <a:endParaRPr kumimoji="1" lang="ja-JP" altLang="en-US"/>
           </a:p>
@@ -2934,7 +3016,7 @@
           <a:p>
             <a:fld id="{32CF0108-805A-4CD7-BE16-DF43657C0E0F}" type="datetimeFigureOut">
               <a:rPr kumimoji="1" lang="ja-JP" altLang="en-US" smtClean="0"/>
-              <a:t>2026/4/24</a:t>
+              <a:t>2026/4/27</a:t>
             </a:fld>
             <a:endParaRPr kumimoji="1" lang="ja-JP" altLang="en-US"/>
           </a:p>
@@ -3047,7 +3129,7 @@
           <a:p>
             <a:fld id="{32CF0108-805A-4CD7-BE16-DF43657C0E0F}" type="datetimeFigureOut">
               <a:rPr kumimoji="1" lang="ja-JP" altLang="en-US" smtClean="0"/>
-              <a:t>2026/4/24</a:t>
+              <a:t>2026/4/27</a:t>
             </a:fld>
             <a:endParaRPr kumimoji="1" lang="ja-JP" altLang="en-US"/>
           </a:p>
@@ -3390,7 +3472,7 @@
           <a:p>
             <a:fld id="{32CF0108-805A-4CD7-BE16-DF43657C0E0F}" type="datetimeFigureOut">
               <a:rPr kumimoji="1" lang="ja-JP" altLang="en-US" smtClean="0"/>
-              <a:t>2026/4/24</a:t>
+              <a:t>2026/4/27</a:t>
             </a:fld>
             <a:endParaRPr kumimoji="1" lang="ja-JP" altLang="en-US"/>
           </a:p>
@@ -3678,7 +3760,7 @@
           <a:p>
             <a:fld id="{32CF0108-805A-4CD7-BE16-DF43657C0E0F}" type="datetimeFigureOut">
               <a:rPr kumimoji="1" lang="ja-JP" altLang="en-US" smtClean="0"/>
-              <a:t>2026/4/24</a:t>
+              <a:t>2026/4/27</a:t>
             </a:fld>
             <a:endParaRPr kumimoji="1" lang="ja-JP" altLang="en-US"/>
           </a:p>
@@ -3961,7 +4043,7 @@
           <a:p>
             <a:fld id="{32CF0108-805A-4CD7-BE16-DF43657C0E0F}" type="datetimeFigureOut">
               <a:rPr kumimoji="1" lang="ja-JP" altLang="en-US" smtClean="0"/>
-              <a:t>2026/4/24</a:t>
+              <a:t>2026/4/27</a:t>
             </a:fld>
             <a:endParaRPr kumimoji="1" lang="ja-JP" altLang="en-US"/>
           </a:p>
@@ -4908,6 +4990,341 @@
 </p:sld>
 </file>
 
+<file path=ppt/slides/slide10.xml><?xml version="1.0" encoding="utf-8"?>
+<p:sld xmlns:a="http://schemas.openxmlformats.org/drawingml/2006/main" xmlns:r="http://schemas.openxmlformats.org/officeDocument/2006/relationships" xmlns:p="http://schemas.openxmlformats.org/presentationml/2006/main">
+  <p:cSld>
+    <p:spTree>
+      <p:nvGrpSpPr>
+        <p:cNvPr id="1" name=""/>
+        <p:cNvGrpSpPr/>
+        <p:nvPr/>
+      </p:nvGrpSpPr>
+      <p:grpSpPr>
+        <a:xfrm>
+          <a:off x="0" y="0"/>
+          <a:ext cx="0" cy="0"/>
+          <a:chOff x="0" y="0"/>
+          <a:chExt cx="0" cy="0"/>
+        </a:xfrm>
+      </p:grpSpPr>
+      <p:sp>
+        <p:nvSpPr>
+          <p:cNvPr id="2" name="テキスト ボックス 1">
+            <a:extLst>
+              <a:ext uri="{FF2B5EF4-FFF2-40B4-BE49-F238E27FC236}">
+                <a16:creationId xmlns:a16="http://schemas.microsoft.com/office/drawing/2014/main" id="{E615B033-9532-CB56-9A15-4C4D08C03A1A}"/>
+              </a:ext>
+            </a:extLst>
+          </p:cNvPr>
+          <p:cNvSpPr txBox="1"/>
+          <p:nvPr/>
+        </p:nvSpPr>
+        <p:spPr>
+          <a:xfrm>
+            <a:off x="-835001" y="203385"/>
+            <a:ext cx="6519876" cy="707886"/>
+          </a:xfrm>
+          <a:prstGeom prst="rect">
+            <a:avLst/>
+          </a:prstGeom>
+          <a:noFill/>
+        </p:spPr>
+        <p:txBody>
+          <a:bodyPr wrap="square" rtlCol="0">
+            <a:spAutoFit/>
+          </a:bodyPr>
+          <a:lstStyle/>
+          <a:p>
+            <a:pPr algn="ctr"/>
+            <a:r>
+              <a:rPr lang="ja-JP" altLang="en-US" sz="4000" b="1" u="sng" dirty="0">
+                <a:effectLst>
+                  <a:outerShdw blurRad="50800" dist="38100" dir="2700000" algn="tl" rotWithShape="0">
+                    <a:prstClr val="black">
+                      <a:alpha val="40000"/>
+                    </a:prstClr>
+                  </a:outerShdw>
+                </a:effectLst>
+              </a:rPr>
+              <a:t>　　　アピールポイント</a:t>
+            </a:r>
+            <a:endParaRPr kumimoji="1" lang="en-US" altLang="ja-JP" sz="4000" b="1" u="sng" dirty="0">
+              <a:effectLst>
+                <a:outerShdw blurRad="50800" dist="38100" dir="2700000" algn="tl" rotWithShape="0">
+                  <a:prstClr val="black">
+                    <a:alpha val="40000"/>
+                  </a:prstClr>
+                </a:outerShdw>
+              </a:effectLst>
+            </a:endParaRPr>
+          </a:p>
+        </p:txBody>
+      </p:sp>
+      <p:sp>
+        <p:nvSpPr>
+          <p:cNvPr id="4" name="テキスト ボックス 3">
+            <a:extLst>
+              <a:ext uri="{FF2B5EF4-FFF2-40B4-BE49-F238E27FC236}">
+                <a16:creationId xmlns:a16="http://schemas.microsoft.com/office/drawing/2014/main" id="{91C1BEBA-2561-B298-21FD-4A0682067230}"/>
+              </a:ext>
+            </a:extLst>
+          </p:cNvPr>
+          <p:cNvSpPr txBox="1"/>
+          <p:nvPr/>
+        </p:nvSpPr>
+        <p:spPr>
+          <a:xfrm>
+            <a:off x="148854" y="1453118"/>
+            <a:ext cx="10703444" cy="1077218"/>
+          </a:xfrm>
+          <a:prstGeom prst="rect">
+            <a:avLst/>
+          </a:prstGeom>
+          <a:noFill/>
+        </p:spPr>
+        <p:txBody>
+          <a:bodyPr wrap="square" rtlCol="0">
+            <a:spAutoFit/>
+          </a:bodyPr>
+          <a:lstStyle/>
+          <a:p>
+            <a:r>
+              <a:rPr kumimoji="1" lang="ja-JP" altLang="en-US" sz="3200" b="1" dirty="0">
+                <a:effectLst>
+                  <a:outerShdw blurRad="50800" dist="38100" dir="2700000" algn="tl" rotWithShape="0">
+                    <a:prstClr val="black">
+                      <a:alpha val="40000"/>
+                    </a:prstClr>
+                  </a:outerShdw>
+                </a:effectLst>
+              </a:rPr>
+              <a:t>・攻めれば攻めるほど、上司にバレる危険性もあるが、</a:t>
+            </a:r>
+            <a:endParaRPr kumimoji="1" lang="en-US" altLang="ja-JP" sz="3200" b="1" dirty="0">
+              <a:effectLst>
+                <a:outerShdw blurRad="50800" dist="38100" dir="2700000" algn="tl" rotWithShape="0">
+                  <a:prstClr val="black">
+                    <a:alpha val="40000"/>
+                  </a:prstClr>
+                </a:outerShdw>
+              </a:effectLst>
+            </a:endParaRPr>
+          </a:p>
+          <a:p>
+            <a:r>
+              <a:rPr lang="ja-JP" altLang="en-US" sz="3200" b="1" dirty="0">
+                <a:effectLst>
+                  <a:outerShdw blurRad="50800" dist="38100" dir="2700000" algn="tl" rotWithShape="0">
+                    <a:prstClr val="black">
+                      <a:alpha val="40000"/>
+                    </a:prstClr>
+                  </a:outerShdw>
+                </a:effectLst>
+              </a:rPr>
+              <a:t>　</a:t>
+            </a:r>
+            <a:r>
+              <a:rPr kumimoji="1" lang="ja-JP" altLang="en-US" sz="3200" b="1" dirty="0">
+                <a:effectLst>
+                  <a:outerShdw blurRad="50800" dist="38100" dir="2700000" algn="tl" rotWithShape="0">
+                    <a:prstClr val="black">
+                      <a:alpha val="40000"/>
+                    </a:prstClr>
+                  </a:outerShdw>
+                </a:effectLst>
+              </a:rPr>
+              <a:t>ギリギリバレなかった時の気持ちよさがある</a:t>
+            </a:r>
+          </a:p>
+        </p:txBody>
+      </p:sp>
+      <p:sp>
+        <p:nvSpPr>
+          <p:cNvPr id="5" name="テキスト ボックス 4">
+            <a:extLst>
+              <a:ext uri="{FF2B5EF4-FFF2-40B4-BE49-F238E27FC236}">
+                <a16:creationId xmlns:a16="http://schemas.microsoft.com/office/drawing/2014/main" id="{15BAA95B-ABA0-F197-5D53-E070DE431172}"/>
+              </a:ext>
+            </a:extLst>
+          </p:cNvPr>
+          <p:cNvSpPr txBox="1"/>
+          <p:nvPr/>
+        </p:nvSpPr>
+        <p:spPr>
+          <a:xfrm>
+            <a:off x="148854" y="2890391"/>
+            <a:ext cx="8399723" cy="584775"/>
+          </a:xfrm>
+          <a:prstGeom prst="rect">
+            <a:avLst/>
+          </a:prstGeom>
+          <a:noFill/>
+        </p:spPr>
+        <p:txBody>
+          <a:bodyPr wrap="square" rtlCol="0">
+            <a:spAutoFit/>
+          </a:bodyPr>
+          <a:lstStyle/>
+          <a:p>
+            <a:r>
+              <a:rPr kumimoji="1" lang="ja-JP" altLang="en-US" sz="3200" b="1" dirty="0">
+                <a:effectLst>
+                  <a:outerShdw blurRad="50800" dist="38100" dir="2700000" algn="tl" rotWithShape="0">
+                    <a:prstClr val="black">
+                      <a:alpha val="40000"/>
+                    </a:prstClr>
+                  </a:outerShdw>
+                </a:effectLst>
+              </a:rPr>
+              <a:t>・いろんなサボりを連続で出来た時のテンポ</a:t>
+            </a:r>
+          </a:p>
+        </p:txBody>
+      </p:sp>
+      <p:sp>
+        <p:nvSpPr>
+          <p:cNvPr id="6" name="テキスト ボックス 5">
+            <a:extLst>
+              <a:ext uri="{FF2B5EF4-FFF2-40B4-BE49-F238E27FC236}">
+                <a16:creationId xmlns:a16="http://schemas.microsoft.com/office/drawing/2014/main" id="{971FDF92-7871-515E-98BC-A610615185AA}"/>
+              </a:ext>
+            </a:extLst>
+          </p:cNvPr>
+          <p:cNvSpPr txBox="1"/>
+          <p:nvPr/>
+        </p:nvSpPr>
+        <p:spPr>
+          <a:xfrm>
+            <a:off x="148855" y="4077694"/>
+            <a:ext cx="3111796" cy="584775"/>
+          </a:xfrm>
+          <a:prstGeom prst="rect">
+            <a:avLst/>
+          </a:prstGeom>
+          <a:noFill/>
+        </p:spPr>
+        <p:txBody>
+          <a:bodyPr wrap="square" rtlCol="0">
+            <a:spAutoFit/>
+          </a:bodyPr>
+          <a:lstStyle/>
+          <a:p>
+            <a:r>
+              <a:rPr kumimoji="1" lang="ja-JP" altLang="en-US" sz="3200" b="1" dirty="0">
+                <a:effectLst>
+                  <a:outerShdw blurRad="50800" dist="38100" dir="2700000" algn="tl" rotWithShape="0">
+                    <a:prstClr val="black">
+                      <a:alpha val="40000"/>
+                    </a:prstClr>
+                  </a:outerShdw>
+                </a:effectLst>
+              </a:rPr>
+              <a:t>・簡単な操作</a:t>
+            </a:r>
+          </a:p>
+        </p:txBody>
+      </p:sp>
+      <p:sp>
+        <p:nvSpPr>
+          <p:cNvPr id="8" name="テキスト ボックス 7">
+            <a:extLst>
+              <a:ext uri="{FF2B5EF4-FFF2-40B4-BE49-F238E27FC236}">
+                <a16:creationId xmlns:a16="http://schemas.microsoft.com/office/drawing/2014/main" id="{A5CDCA9B-6921-0D71-CC84-04496DA6FD5A}"/>
+              </a:ext>
+            </a:extLst>
+          </p:cNvPr>
+          <p:cNvSpPr txBox="1"/>
+          <p:nvPr/>
+        </p:nvSpPr>
+        <p:spPr>
+          <a:xfrm>
+            <a:off x="148854" y="5264997"/>
+            <a:ext cx="8839202" cy="584775"/>
+          </a:xfrm>
+          <a:prstGeom prst="rect">
+            <a:avLst/>
+          </a:prstGeom>
+          <a:noFill/>
+        </p:spPr>
+        <p:txBody>
+          <a:bodyPr wrap="square" rtlCol="0">
+            <a:spAutoFit/>
+          </a:bodyPr>
+          <a:lstStyle/>
+          <a:p>
+            <a:r>
+              <a:rPr kumimoji="1" lang="ja-JP" altLang="en-US" sz="3200" b="1" dirty="0">
+                <a:effectLst>
+                  <a:outerShdw blurRad="50800" dist="38100" dir="2700000" algn="tl" rotWithShape="0">
+                    <a:prstClr val="black">
+                      <a:alpha val="40000"/>
+                    </a:prstClr>
+                  </a:outerShdw>
+                </a:effectLst>
+              </a:rPr>
+              <a:t>・言葉がいらない</a:t>
+            </a:r>
+            <a:r>
+              <a:rPr kumimoji="1" lang="en-US" altLang="ja-JP" sz="3200" b="1" dirty="0">
+                <a:effectLst>
+                  <a:outerShdw blurRad="50800" dist="38100" dir="2700000" algn="tl" rotWithShape="0">
+                    <a:prstClr val="black">
+                      <a:alpha val="40000"/>
+                    </a:prstClr>
+                  </a:outerShdw>
+                </a:effectLst>
+              </a:rPr>
+              <a:t>(</a:t>
+            </a:r>
+            <a:r>
+              <a:rPr kumimoji="1" lang="ja-JP" altLang="en-US" sz="3200" b="1" dirty="0">
+                <a:effectLst>
+                  <a:outerShdw blurRad="50800" dist="38100" dir="2700000" algn="tl" rotWithShape="0">
+                    <a:prstClr val="black">
+                      <a:alpha val="40000"/>
+                    </a:prstClr>
+                  </a:outerShdw>
+                </a:effectLst>
+              </a:rPr>
+              <a:t>言葉がなくても楽しめる</a:t>
+            </a:r>
+            <a:r>
+              <a:rPr kumimoji="1" lang="en-US" altLang="ja-JP" sz="3200" b="1" dirty="0">
+                <a:effectLst>
+                  <a:outerShdw blurRad="50800" dist="38100" dir="2700000" algn="tl" rotWithShape="0">
+                    <a:prstClr val="black">
+                      <a:alpha val="40000"/>
+                    </a:prstClr>
+                  </a:outerShdw>
+                </a:effectLst>
+              </a:rPr>
+              <a:t>)</a:t>
+            </a:r>
+            <a:endParaRPr kumimoji="1" lang="ja-JP" altLang="en-US" sz="3200" b="1" dirty="0">
+              <a:effectLst>
+                <a:outerShdw blurRad="50800" dist="38100" dir="2700000" algn="tl" rotWithShape="0">
+                  <a:prstClr val="black">
+                    <a:alpha val="40000"/>
+                  </a:prstClr>
+                </a:outerShdw>
+              </a:effectLst>
+            </a:endParaRPr>
+          </a:p>
+        </p:txBody>
+      </p:sp>
+    </p:spTree>
+    <p:extLst>
+      <p:ext uri="{BB962C8B-B14F-4D97-AF65-F5344CB8AC3E}">
+        <p14:creationId xmlns:p14="http://schemas.microsoft.com/office/powerpoint/2010/main" val="3829407085"/>
+      </p:ext>
+    </p:extLst>
+  </p:cSld>
+  <p:clrMapOvr>
+    <a:masterClrMapping/>
+  </p:clrMapOvr>
+</p:sld>
+</file>
+
 <file path=ppt/slides/slide2.xml><?xml version="1.0" encoding="utf-8"?>
 <p:sld xmlns:a="http://schemas.openxmlformats.org/drawingml/2006/main" xmlns:r="http://schemas.openxmlformats.org/officeDocument/2006/relationships" xmlns:p="http://schemas.openxmlformats.org/presentationml/2006/main">
   <p:cSld>
@@ -5203,7 +5620,7 @@
         </p:nvSpPr>
         <p:spPr>
           <a:xfrm>
-            <a:off x="87602" y="2257632"/>
+            <a:off x="0" y="2864969"/>
             <a:ext cx="7471144" cy="707886"/>
           </a:xfrm>
           <a:prstGeom prst="rect">
@@ -5322,7 +5739,7 @@
         </p:nvSpPr>
         <p:spPr>
           <a:xfrm>
-            <a:off x="3261748" y="3663884"/>
+            <a:off x="3283519" y="4118376"/>
             <a:ext cx="9090592" cy="707886"/>
           </a:xfrm>
           <a:prstGeom prst="rect">
@@ -5427,6 +5844,80 @@
               </a:rPr>
               <a:t>と読む</a:t>
             </a:r>
+          </a:p>
+        </p:txBody>
+      </p:sp>
+      <p:sp>
+        <p:nvSpPr>
+          <p:cNvPr id="5" name="テキスト ボックス 4">
+            <a:extLst>
+              <a:ext uri="{FF2B5EF4-FFF2-40B4-BE49-F238E27FC236}">
+                <a16:creationId xmlns:a16="http://schemas.microsoft.com/office/drawing/2014/main" id="{B08E16A4-36DA-917F-3484-A7A668B92ECD}"/>
+              </a:ext>
+            </a:extLst>
+          </p:cNvPr>
+          <p:cNvSpPr txBox="1"/>
+          <p:nvPr/>
+        </p:nvSpPr>
+        <p:spPr>
+          <a:xfrm>
+            <a:off x="5704329" y="1884323"/>
+            <a:ext cx="5308515" cy="707886"/>
+          </a:xfrm>
+          <a:prstGeom prst="rect">
+            <a:avLst/>
+          </a:prstGeom>
+          <a:noFill/>
+        </p:spPr>
+        <p:txBody>
+          <a:bodyPr wrap="square" rtlCol="0">
+            <a:spAutoFit/>
+          </a:bodyPr>
+          <a:lstStyle/>
+          <a:p>
+            <a:pPr algn="ctr"/>
+            <a:r>
+              <a:rPr lang="ja-JP" altLang="en-US" sz="4000" b="1" dirty="0">
+                <a:solidFill>
+                  <a:schemeClr val="accent2"/>
+                </a:solidFill>
+                <a:effectLst>
+                  <a:outerShdw blurRad="50800" dist="38100" dir="2700000" algn="tl" rotWithShape="0">
+                    <a:prstClr val="black">
+                      <a:alpha val="40000"/>
+                    </a:prstClr>
+                  </a:outerShdw>
+                </a:effectLst>
+                <a:latin typeface="HGP行書体" panose="03000600000000000000" pitchFamily="66" charset="-128"/>
+                <a:ea typeface="HGP行書体" panose="03000600000000000000" pitchFamily="66" charset="-128"/>
+              </a:rPr>
+              <a:t>サボる</a:t>
+            </a:r>
+            <a:r>
+              <a:rPr lang="ja-JP" altLang="en-US" sz="4000" b="1" dirty="0">
+                <a:effectLst>
+                  <a:outerShdw blurRad="50800" dist="38100" dir="2700000" algn="tl" rotWithShape="0">
+                    <a:prstClr val="black">
+                      <a:alpha val="40000"/>
+                    </a:prstClr>
+                  </a:outerShdw>
+                </a:effectLst>
+                <a:latin typeface="HGP行書体" panose="03000600000000000000" pitchFamily="66" charset="-128"/>
+                <a:ea typeface="HGP行書体" panose="03000600000000000000" pitchFamily="66" charset="-128"/>
+              </a:rPr>
+              <a:t>ためなら何でもする</a:t>
+            </a:r>
+            <a:endParaRPr kumimoji="1" lang="ja-JP" altLang="en-US" sz="4000" b="1" dirty="0">
+              <a:effectLst>
+                <a:outerShdw blurRad="50800" dist="38100" dir="2700000" algn="tl" rotWithShape="0">
+                  <a:prstClr val="black">
+                    <a:alpha val="40000"/>
+                  </a:prstClr>
+                </a:outerShdw>
+              </a:effectLst>
+              <a:latin typeface="HGP行書体" panose="03000600000000000000" pitchFamily="66" charset="-128"/>
+              <a:ea typeface="HGP行書体" panose="03000600000000000000" pitchFamily="66" charset="-128"/>
+            </a:endParaRPr>
           </a:p>
         </p:txBody>
       </p:sp>
@@ -5474,7 +5965,7 @@
         </p:nvSpPr>
         <p:spPr>
           <a:xfrm>
-            <a:off x="318923" y="2199215"/>
+            <a:off x="318923" y="2063706"/>
             <a:ext cx="5556203" cy="584775"/>
           </a:xfrm>
           <a:prstGeom prst="rect">
@@ -5710,7 +6201,7 @@
         </p:nvSpPr>
         <p:spPr>
           <a:xfrm>
-            <a:off x="251391" y="3182579"/>
+            <a:off x="308047" y="3021732"/>
             <a:ext cx="11090654" cy="1077218"/>
           </a:xfrm>
           <a:prstGeom prst="rect">
@@ -5781,8 +6272,29 @@
                   </a:outerShdw>
                 </a:effectLst>
               </a:rPr>
-              <a:t>         結果的にサボリーマン判定をもらう</a:t>
-            </a:r>
+              <a:t>         結果的にサボリーマン判定をもらい、</a:t>
+            </a:r>
+            <a:r>
+              <a:rPr lang="ja-JP" altLang="en-US" sz="3200" b="1" dirty="0">
+                <a:effectLst>
+                  <a:outerShdw blurRad="50800" dist="38100" dir="2700000" algn="tl" rotWithShape="0">
+                    <a:prstClr val="black">
+                      <a:alpha val="40000"/>
+                    </a:prstClr>
+                  </a:outerShdw>
+                </a:effectLst>
+              </a:rPr>
+              <a:t>スコアを競う</a:t>
+            </a:r>
+            <a:endParaRPr kumimoji="1" lang="ja-JP" altLang="en-US" sz="3200" b="1" dirty="0">
+              <a:effectLst>
+                <a:outerShdw blurRad="50800" dist="38100" dir="2700000" algn="tl" rotWithShape="0">
+                  <a:prstClr val="black">
+                    <a:alpha val="40000"/>
+                  </a:prstClr>
+                </a:outerShdw>
+              </a:effectLst>
+            </a:endParaRPr>
           </a:p>
         </p:txBody>
       </p:sp>
@@ -5975,7 +6487,7 @@
         </p:nvSpPr>
         <p:spPr>
           <a:xfrm>
-            <a:off x="-835002" y="203385"/>
+            <a:off x="-835002" y="103701"/>
             <a:ext cx="4365225" cy="707886"/>
           </a:xfrm>
           <a:prstGeom prst="rect">
@@ -6014,56 +6526,212 @@
           </a:p>
         </p:txBody>
       </p:sp>
-      <p:pic>
-        <p:nvPicPr>
-          <p:cNvPr id="5" name="図 4">
-            <a:extLst>
-              <a:ext uri="{FF2B5EF4-FFF2-40B4-BE49-F238E27FC236}">
-                <a16:creationId xmlns:a16="http://schemas.microsoft.com/office/drawing/2014/main" id="{87C02FD1-FDC6-8244-0020-CCA1669AE5B6}"/>
-              </a:ext>
-            </a:extLst>
-          </p:cNvPr>
-          <p:cNvPicPr>
-            <a:picLocks noChangeAspect="1"/>
-          </p:cNvPicPr>
+      <p:grpSp>
+        <p:nvGrpSpPr>
+          <p:cNvPr id="4" name="グループ化 3">
+            <a:extLst>
+              <a:ext uri="{FF2B5EF4-FFF2-40B4-BE49-F238E27FC236}">
+                <a16:creationId xmlns:a16="http://schemas.microsoft.com/office/drawing/2014/main" id="{F37DA7DC-F81A-6ED7-7D62-0753368880F3}"/>
+              </a:ext>
+            </a:extLst>
+          </p:cNvPr>
+          <p:cNvGrpSpPr/>
           <p:nvPr/>
-        </p:nvPicPr>
-        <p:blipFill>
-          <a:blip r:embed="rId2">
-            <a:extLst>
-              <a:ext uri="{28A0092B-C50C-407E-A947-70E740481C1C}">
-                <a14:useLocalDpi xmlns:a14="http://schemas.microsoft.com/office/drawing/2010/main" val="0"/>
-              </a:ext>
-            </a:extLst>
-          </a:blip>
-          <a:stretch>
-            <a:fillRect/>
-          </a:stretch>
-        </p:blipFill>
+        </p:nvGrpSpPr>
+        <p:grpSpPr>
+          <a:xfrm>
+            <a:off x="1121397" y="911271"/>
+            <a:ext cx="9949206" cy="5135142"/>
+            <a:chOff x="921489" y="1187441"/>
+            <a:chExt cx="10065488" cy="5309051"/>
+          </a:xfrm>
+        </p:grpSpPr>
+        <p:pic>
+          <p:nvPicPr>
+            <p:cNvPr id="5" name="図 4">
+              <a:extLst>
+                <a:ext uri="{FF2B5EF4-FFF2-40B4-BE49-F238E27FC236}">
+                  <a16:creationId xmlns:a16="http://schemas.microsoft.com/office/drawing/2014/main" id="{87C02FD1-FDC6-8244-0020-CCA1669AE5B6}"/>
+                </a:ext>
+              </a:extLst>
+            </p:cNvPr>
+            <p:cNvPicPr>
+              <a:picLocks noChangeAspect="1"/>
+            </p:cNvPicPr>
+            <p:nvPr/>
+          </p:nvPicPr>
+          <p:blipFill>
+            <a:blip r:embed="rId2">
+              <a:extLst>
+                <a:ext uri="{28A0092B-C50C-407E-A947-70E740481C1C}">
+                  <a14:useLocalDpi xmlns:a14="http://schemas.microsoft.com/office/drawing/2010/main" val="0"/>
+                </a:ext>
+              </a:extLst>
+            </a:blip>
+            <a:stretch>
+              <a:fillRect/>
+            </a:stretch>
+          </p:blipFill>
+          <p:spPr>
+            <a:xfrm>
+              <a:off x="921489" y="1187441"/>
+              <a:ext cx="10065488" cy="5309051"/>
+            </a:xfrm>
+            <a:prstGeom prst="rect">
+              <a:avLst/>
+            </a:prstGeom>
+            <a:ln w="38100" cap="sq">
+              <a:solidFill>
+                <a:srgbClr val="000000"/>
+              </a:solidFill>
+              <a:prstDash val="solid"/>
+              <a:miter lim="800000"/>
+            </a:ln>
+            <a:effectLst>
+              <a:outerShdw blurRad="50800" dist="38100" dir="2700000" algn="tl" rotWithShape="0">
+                <a:prstClr val="black">
+                  <a:alpha val="40000"/>
+                </a:prstClr>
+              </a:outerShdw>
+            </a:effectLst>
+          </p:spPr>
+        </p:pic>
+        <p:sp>
+          <p:nvSpPr>
+            <p:cNvPr id="3" name="正方形/長方形 2">
+              <a:extLst>
+                <a:ext uri="{FF2B5EF4-FFF2-40B4-BE49-F238E27FC236}">
+                  <a16:creationId xmlns:a16="http://schemas.microsoft.com/office/drawing/2014/main" id="{8AD2D045-F13D-2BA3-92D4-46D66E72B222}"/>
+                </a:ext>
+              </a:extLst>
+            </p:cNvPr>
+            <p:cNvSpPr/>
+            <p:nvPr/>
+          </p:nvSpPr>
+          <p:spPr>
+            <a:xfrm>
+              <a:off x="6798559" y="1771234"/>
+              <a:ext cx="692424" cy="424832"/>
+            </a:xfrm>
+            <a:prstGeom prst="rect">
+              <a:avLst/>
+            </a:prstGeom>
+            <a:solidFill>
+              <a:schemeClr val="bg1"/>
+            </a:solidFill>
+          </p:spPr>
+          <p:style>
+            <a:lnRef idx="2">
+              <a:schemeClr val="accent1">
+                <a:shade val="15000"/>
+              </a:schemeClr>
+            </a:lnRef>
+            <a:fillRef idx="1">
+              <a:schemeClr val="accent1"/>
+            </a:fillRef>
+            <a:effectRef idx="0">
+              <a:schemeClr val="accent1"/>
+            </a:effectRef>
+            <a:fontRef idx="minor">
+              <a:schemeClr val="lt1"/>
+            </a:fontRef>
+          </p:style>
+          <p:txBody>
+            <a:bodyPr rtlCol="0" anchor="ctr"/>
+            <a:lstStyle/>
+            <a:p>
+              <a:pPr algn="ctr"/>
+              <a:r>
+                <a:rPr kumimoji="1" lang="ja-JP" altLang="en-US" sz="1200" b="1" dirty="0">
+                  <a:solidFill>
+                    <a:schemeClr val="tx1"/>
+                  </a:solidFill>
+                </a:rPr>
+                <a:t>コピー機</a:t>
+              </a:r>
+            </a:p>
+          </p:txBody>
+        </p:sp>
+      </p:grpSp>
+      <p:sp>
+        <p:nvSpPr>
+          <p:cNvPr id="6" name="テキスト ボックス 5">
+            <a:extLst>
+              <a:ext uri="{FF2B5EF4-FFF2-40B4-BE49-F238E27FC236}">
+                <a16:creationId xmlns:a16="http://schemas.microsoft.com/office/drawing/2014/main" id="{56E90EA5-FD44-5F44-B318-FC5637A79D37}"/>
+              </a:ext>
+            </a:extLst>
+          </p:cNvPr>
+          <p:cNvSpPr txBox="1"/>
+          <p:nvPr/>
+        </p:nvSpPr>
         <p:spPr>
           <a:xfrm>
-            <a:off x="921489" y="1187441"/>
-            <a:ext cx="10065488" cy="5309051"/>
+            <a:off x="1451331" y="6273225"/>
+            <a:ext cx="9289338" cy="584775"/>
           </a:xfrm>
           <a:prstGeom prst="rect">
             <a:avLst/>
           </a:prstGeom>
-          <a:ln w="38100" cap="sq">
-            <a:solidFill>
-              <a:srgbClr val="000000"/>
-            </a:solidFill>
-            <a:prstDash val="solid"/>
-            <a:miter lim="800000"/>
-          </a:ln>
-          <a:effectLst>
-            <a:outerShdw blurRad="50800" dist="38100" dir="2700000" algn="tl" rotWithShape="0">
-              <a:prstClr val="black">
-                <a:alpha val="40000"/>
-              </a:prstClr>
-            </a:outerShdw>
-          </a:effectLst>
+          <a:noFill/>
         </p:spPr>
-      </p:pic>
+        <p:txBody>
+          <a:bodyPr wrap="square" rtlCol="0">
+            <a:spAutoFit/>
+          </a:bodyPr>
+          <a:lstStyle/>
+          <a:p>
+            <a:pPr algn="ctr"/>
+            <a:r>
+              <a:rPr kumimoji="1" lang="ja-JP" altLang="en-US" sz="3200" b="1" dirty="0">
+                <a:effectLst>
+                  <a:outerShdw blurRad="50800" dist="38100" dir="2700000" algn="tl" rotWithShape="0">
+                    <a:prstClr val="black">
+                      <a:alpha val="40000"/>
+                    </a:prstClr>
+                  </a:outerShdw>
+                </a:effectLst>
+              </a:rPr>
+              <a:t>タスクは自席やコピー機、同僚の席などでできる</a:t>
+            </a:r>
+          </a:p>
+        </p:txBody>
+      </p:sp>
+      <p:sp>
+        <p:nvSpPr>
+          <p:cNvPr id="7" name="テキスト ボックス 6">
+            <a:extLst>
+              <a:ext uri="{FF2B5EF4-FFF2-40B4-BE49-F238E27FC236}">
+                <a16:creationId xmlns:a16="http://schemas.microsoft.com/office/drawing/2014/main" id="{D885F7F2-3BCA-20C9-7EB6-341A8F6C3DC8}"/>
+              </a:ext>
+            </a:extLst>
+          </p:cNvPr>
+          <p:cNvSpPr txBox="1"/>
+          <p:nvPr/>
+        </p:nvSpPr>
+        <p:spPr>
+          <a:xfrm>
+            <a:off x="1828800" y="3519715"/>
+            <a:ext cx="805543" cy="276999"/>
+          </a:xfrm>
+          <a:prstGeom prst="rect">
+            <a:avLst/>
+          </a:prstGeom>
+          <a:noFill/>
+        </p:spPr>
+        <p:txBody>
+          <a:bodyPr wrap="square" rtlCol="0">
+            <a:spAutoFit/>
+          </a:bodyPr>
+          <a:lstStyle/>
+          <a:p>
+            <a:r>
+              <a:rPr kumimoji="1" lang="ja-JP" altLang="en-US" sz="1200" b="1" dirty="0"/>
+              <a:t>同僚の席</a:t>
+            </a:r>
+          </a:p>
+        </p:txBody>
+      </p:sp>
     </p:spTree>
     <p:extLst>
       <p:ext uri="{BB962C8B-B14F-4D97-AF65-F5344CB8AC3E}">
@@ -6715,7 +7383,7 @@
         </p:nvSpPr>
         <p:spPr>
           <a:xfrm>
-            <a:off x="511378" y="1026102"/>
+            <a:off x="418215" y="1026377"/>
             <a:ext cx="2041452" cy="584775"/>
           </a:xfrm>
           <a:prstGeom prst="rect">
@@ -6792,8 +7460,8 @@
         </p:nvSpPr>
         <p:spPr>
           <a:xfrm>
-            <a:off x="192945" y="1726259"/>
-            <a:ext cx="5056841" cy="1569660"/>
+            <a:off x="418215" y="1777058"/>
+            <a:ext cx="5764871" cy="1815882"/>
           </a:xfrm>
           <a:prstGeom prst="rect">
             <a:avLst/>
@@ -6807,7 +7475,7 @@
           <a:lstStyle/>
           <a:p>
             <a:r>
-              <a:rPr kumimoji="1" lang="ja-JP" altLang="en-US" sz="2400" b="1" dirty="0">
+              <a:rPr kumimoji="1" lang="ja-JP" altLang="en-US" sz="2800" b="1" dirty="0">
                 <a:effectLst>
                   <a:outerShdw blurRad="50800" dist="38100" dir="2700000" algn="tl" rotWithShape="0">
                     <a:prstClr val="black">
@@ -6819,7 +7487,7 @@
               <a:t>会社で</a:t>
             </a:r>
             <a:r>
-              <a:rPr lang="ja-JP" altLang="en-US" sz="2400" b="1" dirty="0">
+              <a:rPr lang="ja-JP" altLang="en-US" sz="2800" b="1" dirty="0">
                 <a:effectLst>
                   <a:outerShdw blurRad="50800" dist="38100" dir="2700000" algn="tl" rotWithShape="0">
                     <a:prstClr val="black">
@@ -6830,7 +7498,7 @@
               </a:rPr>
               <a:t>働きづめなサラリーマンが</a:t>
             </a:r>
-            <a:endParaRPr lang="en-US" altLang="ja-JP" sz="2400" b="1" dirty="0">
+            <a:endParaRPr lang="en-US" altLang="ja-JP" sz="2800" b="1" dirty="0">
               <a:effectLst>
                 <a:outerShdw blurRad="50800" dist="38100" dir="2700000" algn="tl" rotWithShape="0">
                   <a:prstClr val="black">
@@ -6842,7 +7510,7 @@
           </a:p>
           <a:p>
             <a:r>
-              <a:rPr kumimoji="1" lang="ja-JP" altLang="en-US" sz="2400" b="1" dirty="0">
+              <a:rPr kumimoji="1" lang="ja-JP" altLang="en-US" sz="2800" b="1" dirty="0">
                 <a:effectLst>
                   <a:outerShdw blurRad="50800" dist="38100" dir="2700000" algn="tl" rotWithShape="0">
                     <a:prstClr val="black">
@@ -6853,7 +7521,7 @@
               </a:rPr>
               <a:t>一流のサボリーマンを目指し</a:t>
             </a:r>
-            <a:endParaRPr kumimoji="1" lang="en-US" altLang="ja-JP" sz="2400" b="1" dirty="0">
+            <a:endParaRPr kumimoji="1" lang="en-US" altLang="ja-JP" sz="2800" b="1" dirty="0">
               <a:effectLst>
                 <a:outerShdw blurRad="50800" dist="38100" dir="2700000" algn="tl" rotWithShape="0">
                   <a:prstClr val="black">
@@ -6865,7 +7533,7 @@
           </a:p>
           <a:p>
             <a:r>
-              <a:rPr lang="ja-JP" altLang="en-US" sz="2400" b="1" dirty="0">
+              <a:rPr lang="ja-JP" altLang="en-US" sz="2800" b="1" dirty="0">
                 <a:effectLst>
                   <a:outerShdw blurRad="50800" dist="38100" dir="2700000" algn="tl" rotWithShape="0">
                     <a:prstClr val="black">
@@ -6876,7 +7544,7 @@
               </a:rPr>
               <a:t>上司の目を盗み</a:t>
             </a:r>
-            <a:endParaRPr lang="en-US" altLang="ja-JP" sz="2400" b="1" dirty="0">
+            <a:endParaRPr lang="en-US" altLang="ja-JP" sz="2800" b="1" dirty="0">
               <a:effectLst>
                 <a:outerShdw blurRad="50800" dist="38100" dir="2700000" algn="tl" rotWithShape="0">
                   <a:prstClr val="black">
@@ -6888,7 +7556,7 @@
           </a:p>
           <a:p>
             <a:r>
-              <a:rPr kumimoji="1" lang="ja-JP" altLang="en-US" sz="2400" b="1" dirty="0">
+              <a:rPr kumimoji="1" lang="ja-JP" altLang="en-US" sz="2800" b="1" dirty="0">
                 <a:effectLst>
                   <a:outerShdw blurRad="50800" dist="38100" dir="2700000" algn="tl" rotWithShape="0">
                     <a:prstClr val="black">
@@ -6899,7 +7567,7 @@
               </a:rPr>
               <a:t>サボりまくる</a:t>
             </a:r>
-            <a:endParaRPr kumimoji="1" lang="en-US" altLang="ja-JP" sz="2400" b="1" dirty="0">
+            <a:endParaRPr kumimoji="1" lang="en-US" altLang="ja-JP" sz="2800" b="1" dirty="0">
               <a:effectLst>
                 <a:outerShdw blurRad="50800" dist="38100" dir="2700000" algn="tl" rotWithShape="0">
                   <a:prstClr val="black">
@@ -6925,7 +7593,7 @@
         </p:nvSpPr>
         <p:spPr>
           <a:xfrm>
-            <a:off x="365569" y="4055202"/>
+            <a:off x="418215" y="3696858"/>
             <a:ext cx="2041452" cy="584775"/>
           </a:xfrm>
           <a:prstGeom prst="rect">
@@ -7002,8 +7670,8 @@
         </p:nvSpPr>
         <p:spPr>
           <a:xfrm>
-            <a:off x="93378" y="4792062"/>
-            <a:ext cx="5677074" cy="1569660"/>
+            <a:off x="418215" y="4454442"/>
+            <a:ext cx="10464799" cy="1815882"/>
           </a:xfrm>
           <a:prstGeom prst="rect">
             <a:avLst/>
@@ -7017,7 +7685,7 @@
           <a:lstStyle/>
           <a:p>
             <a:r>
-              <a:rPr kumimoji="1" lang="ja-JP" altLang="en-US" sz="2400" b="1" dirty="0">
+              <a:rPr kumimoji="1" lang="ja-JP" altLang="en-US" sz="2800" b="1" dirty="0">
                 <a:effectLst>
                   <a:outerShdw blurRad="50800" dist="38100" dir="2700000" algn="tl" rotWithShape="0">
                     <a:prstClr val="black">
@@ -7028,7 +7696,79 @@
               </a:rPr>
               <a:t>サボりのバリエーションが増えていく</a:t>
             </a:r>
-            <a:endParaRPr kumimoji="1" lang="en-US" altLang="ja-JP" sz="2400" b="1" dirty="0">
+            <a:r>
+              <a:rPr lang="en-US" altLang="ja-JP" sz="2800" b="1" dirty="0">
+                <a:effectLst>
+                  <a:outerShdw blurRad="50800" dist="38100" dir="2700000" algn="tl" rotWithShape="0">
+                    <a:prstClr val="black">
+                      <a:alpha val="40000"/>
+                    </a:prstClr>
+                  </a:outerShdw>
+                </a:effectLst>
+              </a:rPr>
+              <a:t>/</a:t>
+            </a:r>
+            <a:r>
+              <a:rPr kumimoji="1" lang="ja-JP" altLang="en-US" sz="2800" b="1" dirty="0">
+                <a:effectLst>
+                  <a:outerShdw blurRad="50800" dist="38100" dir="2700000" algn="tl" rotWithShape="0">
+                    <a:prstClr val="black">
+                      <a:alpha val="40000"/>
+                    </a:prstClr>
+                  </a:outerShdw>
+                </a:effectLst>
+              </a:rPr>
+              <a:t>規模</a:t>
+            </a:r>
+            <a:r>
+              <a:rPr kumimoji="1" lang="en-US" altLang="ja-JP" sz="2800" b="1" dirty="0">
+                <a:effectLst>
+                  <a:outerShdw blurRad="50800" dist="38100" dir="2700000" algn="tl" rotWithShape="0">
+                    <a:prstClr val="black">
+                      <a:alpha val="40000"/>
+                    </a:prstClr>
+                  </a:outerShdw>
+                </a:effectLst>
+              </a:rPr>
+              <a:t>(</a:t>
+            </a:r>
+            <a:r>
+              <a:rPr kumimoji="1" lang="ja-JP" altLang="en-US" sz="2800" b="1" dirty="0">
+                <a:effectLst>
+                  <a:outerShdw blurRad="50800" dist="38100" dir="2700000" algn="tl" rotWithShape="0">
+                    <a:prstClr val="black">
+                      <a:alpha val="40000"/>
+                    </a:prstClr>
+                  </a:outerShdw>
+                </a:effectLst>
+              </a:rPr>
+              <a:t>移動範囲</a:t>
+            </a:r>
+            <a:r>
+              <a:rPr kumimoji="1" lang="en-US" altLang="ja-JP" sz="2800" b="1" dirty="0">
+                <a:effectLst>
+                  <a:outerShdw blurRad="50800" dist="38100" dir="2700000" algn="tl" rotWithShape="0">
+                    <a:prstClr val="black">
+                      <a:alpha val="40000"/>
+                    </a:prstClr>
+                  </a:outerShdw>
+                </a:effectLst>
+              </a:rPr>
+              <a:t>)</a:t>
+            </a:r>
+            <a:r>
+              <a:rPr kumimoji="1" lang="ja-JP" altLang="en-US" sz="2800" b="1" dirty="0">
+                <a:effectLst>
+                  <a:outerShdw blurRad="50800" dist="38100" dir="2700000" algn="tl" rotWithShape="0">
+                    <a:prstClr val="black">
+                      <a:alpha val="40000"/>
+                    </a:prstClr>
+                  </a:outerShdw>
+                </a:effectLst>
+              </a:rPr>
+              <a:t>も大きく</a:t>
+            </a:r>
+            <a:endParaRPr kumimoji="1" lang="en-US" altLang="ja-JP" sz="2800" b="1" dirty="0">
               <a:effectLst>
                 <a:outerShdw blurRad="50800" dist="38100" dir="2700000" algn="tl" rotWithShape="0">
                   <a:prstClr val="black">
@@ -7040,19 +7780,19 @@
           </a:p>
           <a:p>
             <a:r>
-              <a:rPr kumimoji="1" lang="ja-JP" altLang="en-US" sz="2400" b="1" dirty="0">
-                <a:effectLst>
-                  <a:outerShdw blurRad="50800" dist="38100" dir="2700000" algn="tl" rotWithShape="0">
-                    <a:prstClr val="black">
-                      <a:alpha val="40000"/>
-                    </a:prstClr>
-                  </a:outerShdw>
-                </a:effectLst>
-              </a:rPr>
-              <a:t>規模</a:t>
-            </a:r>
-            <a:r>
-              <a:rPr kumimoji="1" lang="en-US" altLang="ja-JP" sz="2400" b="1" dirty="0">
+              <a:rPr lang="ja-JP" altLang="en-US" sz="2800" b="1" dirty="0">
+                <a:effectLst>
+                  <a:outerShdw blurRad="50800" dist="38100" dir="2700000" algn="tl" rotWithShape="0">
+                    <a:prstClr val="black">
+                      <a:alpha val="40000"/>
+                    </a:prstClr>
+                  </a:outerShdw>
+                </a:effectLst>
+              </a:rPr>
+              <a:t>緊急会議</a:t>
+            </a:r>
+            <a:r>
+              <a:rPr lang="en-US" altLang="ja-JP" sz="2800" b="1" dirty="0">
                 <a:effectLst>
                   <a:outerShdw blurRad="50800" dist="38100" dir="2700000" algn="tl" rotWithShape="0">
                     <a:prstClr val="black">
@@ -7064,19 +7804,19 @@
               <a:t>(</a:t>
             </a:r>
             <a:r>
-              <a:rPr kumimoji="1" lang="ja-JP" altLang="en-US" sz="2400" b="1" dirty="0">
-                <a:effectLst>
-                  <a:outerShdw blurRad="50800" dist="38100" dir="2700000" algn="tl" rotWithShape="0">
-                    <a:prstClr val="black">
-                      <a:alpha val="40000"/>
-                    </a:prstClr>
-                  </a:outerShdw>
-                </a:effectLst>
-              </a:rPr>
-              <a:t>移動範囲</a:t>
-            </a:r>
-            <a:r>
-              <a:rPr kumimoji="1" lang="en-US" altLang="ja-JP" sz="2400" b="1" dirty="0">
+              <a:rPr lang="ja-JP" altLang="en-US" sz="2800" b="1" dirty="0">
+                <a:effectLst>
+                  <a:outerShdw blurRad="50800" dist="38100" dir="2700000" algn="tl" rotWithShape="0">
+                    <a:prstClr val="black">
+                      <a:alpha val="40000"/>
+                    </a:prstClr>
+                  </a:outerShdw>
+                </a:effectLst>
+              </a:rPr>
+              <a:t>オフィスに上司がいなくなる</a:t>
+            </a:r>
+            <a:r>
+              <a:rPr lang="en-US" altLang="ja-JP" sz="2800" b="1" dirty="0">
                 <a:effectLst>
                   <a:outerShdw blurRad="50800" dist="38100" dir="2700000" algn="tl" rotWithShape="0">
                     <a:prstClr val="black">
@@ -7088,18 +7828,18 @@
               <a:t>)</a:t>
             </a:r>
             <a:r>
-              <a:rPr kumimoji="1" lang="ja-JP" altLang="en-US" sz="2400" b="1" dirty="0">
-                <a:effectLst>
-                  <a:outerShdw blurRad="50800" dist="38100" dir="2700000" algn="tl" rotWithShape="0">
-                    <a:prstClr val="black">
-                      <a:alpha val="40000"/>
-                    </a:prstClr>
-                  </a:outerShdw>
-                </a:effectLst>
-              </a:rPr>
-              <a:t>も大きく</a:t>
-            </a:r>
-            <a:endParaRPr kumimoji="1" lang="en-US" altLang="ja-JP" sz="2400" b="1" dirty="0">
+              <a:rPr lang="ja-JP" altLang="en-US" sz="2800" b="1" dirty="0">
+                <a:effectLst>
+                  <a:outerShdw blurRad="50800" dist="38100" dir="2700000" algn="tl" rotWithShape="0">
+                    <a:prstClr val="black">
+                      <a:alpha val="40000"/>
+                    </a:prstClr>
+                  </a:outerShdw>
+                </a:effectLst>
+              </a:rPr>
+              <a:t>、</a:t>
+            </a:r>
+            <a:endParaRPr lang="en-US" altLang="ja-JP" sz="2800" b="1" dirty="0">
               <a:effectLst>
                 <a:outerShdw blurRad="50800" dist="38100" dir="2700000" algn="tl" rotWithShape="0">
                   <a:prstClr val="black">
@@ -7111,19 +7851,19 @@
           </a:p>
           <a:p>
             <a:r>
-              <a:rPr lang="ja-JP" altLang="en-US" sz="2400" b="1" dirty="0">
-                <a:effectLst>
-                  <a:outerShdw blurRad="50800" dist="38100" dir="2700000" algn="tl" rotWithShape="0">
-                    <a:prstClr val="black">
-                      <a:alpha val="40000"/>
-                    </a:prstClr>
-                  </a:outerShdw>
-                </a:effectLst>
-              </a:rPr>
-              <a:t>緊急会議</a:t>
-            </a:r>
-            <a:r>
-              <a:rPr lang="en-US" altLang="ja-JP" sz="2400" b="1" dirty="0">
+              <a:rPr lang="ja-JP" altLang="en-US" sz="2800" b="1" dirty="0">
+                <a:effectLst>
+                  <a:outerShdw blurRad="50800" dist="38100" dir="2700000" algn="tl" rotWithShape="0">
+                    <a:prstClr val="black">
+                      <a:alpha val="40000"/>
+                    </a:prstClr>
+                  </a:outerShdw>
+                </a:effectLst>
+              </a:rPr>
+              <a:t>社長襲来</a:t>
+            </a:r>
+            <a:r>
+              <a:rPr lang="en-US" altLang="ja-JP" sz="2800" b="1" dirty="0">
                 <a:effectLst>
                   <a:outerShdw blurRad="50800" dist="38100" dir="2700000" algn="tl" rotWithShape="0">
                     <a:prstClr val="black">
@@ -7135,19 +7875,19 @@
               <a:t>(</a:t>
             </a:r>
             <a:r>
-              <a:rPr lang="ja-JP" altLang="en-US" sz="2400" b="1" dirty="0">
-                <a:effectLst>
-                  <a:outerShdw blurRad="50800" dist="38100" dir="2700000" algn="tl" rotWithShape="0">
-                    <a:prstClr val="black">
-                      <a:alpha val="40000"/>
-                    </a:prstClr>
-                  </a:outerShdw>
-                </a:effectLst>
-              </a:rPr>
-              <a:t>オフィスに上司がいなくなる</a:t>
-            </a:r>
-            <a:r>
-              <a:rPr lang="en-US" altLang="ja-JP" sz="2400" b="1" dirty="0">
+              <a:rPr lang="ja-JP" altLang="en-US" sz="2800" b="1" dirty="0">
+                <a:effectLst>
+                  <a:outerShdw blurRad="50800" dist="38100" dir="2700000" algn="tl" rotWithShape="0">
+                    <a:prstClr val="black">
+                      <a:alpha val="40000"/>
+                    </a:prstClr>
+                  </a:outerShdw>
+                </a:effectLst>
+              </a:rPr>
+              <a:t>上司のさらに上の上司が来る</a:t>
+            </a:r>
+            <a:r>
+              <a:rPr lang="en-US" altLang="ja-JP" sz="2800" b="1" dirty="0">
                 <a:effectLst>
                   <a:outerShdw blurRad="50800" dist="38100" dir="2700000" algn="tl" rotWithShape="0">
                     <a:prstClr val="black">
@@ -7158,10 +7898,8 @@
               </a:rPr>
               <a:t>)</a:t>
             </a:r>
-          </a:p>
-          <a:p>
-            <a:r>
-              <a:rPr lang="ja-JP" altLang="en-US" sz="2400" b="1" dirty="0">
+            <a:r>
+              <a:rPr lang="ja-JP" altLang="en-US" sz="2800" b="1" dirty="0">
                 <a:effectLst>
                   <a:outerShdw blurRad="50800" dist="38100" dir="2700000" algn="tl" rotWithShape="0">
                     <a:prstClr val="black">
@@ -7172,7 +7910,7 @@
               </a:rPr>
               <a:t>などのイベント発生</a:t>
             </a:r>
-            <a:endParaRPr kumimoji="1" lang="en-US" altLang="ja-JP" sz="2400" b="1" dirty="0">
+            <a:endParaRPr lang="en-US" altLang="ja-JP" sz="2800" b="1" dirty="0">
               <a:effectLst>
                 <a:outerShdw blurRad="50800" dist="38100" dir="2700000" algn="tl" rotWithShape="0">
                   <a:prstClr val="black">
@@ -7182,14 +7920,37 @@
               </a:effectLst>
             </a:endParaRPr>
           </a:p>
-        </p:txBody>
-      </p:sp>
-      <p:sp>
-        <p:nvSpPr>
-          <p:cNvPr id="8" name="テキスト ボックス 7">
-            <a:extLst>
-              <a:ext uri="{FF2B5EF4-FFF2-40B4-BE49-F238E27FC236}">
-                <a16:creationId xmlns:a16="http://schemas.microsoft.com/office/drawing/2014/main" id="{A48829C8-87BD-8742-D769-087B35A48A1D}"/>
+          <a:p>
+            <a:r>
+              <a:rPr kumimoji="1" lang="ja-JP" altLang="en-US" sz="2800" b="1" dirty="0">
+                <a:effectLst>
+                  <a:outerShdw blurRad="50800" dist="38100" dir="2700000" algn="tl" rotWithShape="0">
+                    <a:prstClr val="black">
+                      <a:alpha val="40000"/>
+                    </a:prstClr>
+                  </a:outerShdw>
+                </a:effectLst>
+              </a:rPr>
+              <a:t>上司によるフェイントがあるかも</a:t>
+            </a:r>
+            <a:endParaRPr kumimoji="1" lang="en-US" altLang="ja-JP" sz="2800" b="1" dirty="0">
+              <a:effectLst>
+                <a:outerShdw blurRad="50800" dist="38100" dir="2700000" algn="tl" rotWithShape="0">
+                  <a:prstClr val="black">
+                    <a:alpha val="40000"/>
+                  </a:prstClr>
+                </a:outerShdw>
+              </a:effectLst>
+            </a:endParaRPr>
+          </a:p>
+        </p:txBody>
+      </p:sp>
+      <p:sp>
+        <p:nvSpPr>
+          <p:cNvPr id="11" name="テキスト ボックス 10">
+            <a:extLst>
+              <a:ext uri="{FF2B5EF4-FFF2-40B4-BE49-F238E27FC236}">
+                <a16:creationId xmlns:a16="http://schemas.microsoft.com/office/drawing/2014/main" id="{CFBA1915-F34F-2D67-3E99-70C6C1ED256F}"/>
               </a:ext>
             </a:extLst>
           </p:cNvPr>
@@ -7198,8 +7959,8 @@
         </p:nvSpPr>
         <p:spPr>
           <a:xfrm>
-            <a:off x="6294655" y="203385"/>
-            <a:ext cx="2312316" cy="584775"/>
+            <a:off x="6354555" y="1026376"/>
+            <a:ext cx="3362757" cy="584775"/>
           </a:xfrm>
           <a:prstGeom prst="rect">
             <a:avLst/>
@@ -7247,7 +8008,7 @@
                   </a:outerShdw>
                 </a:effectLst>
               </a:rPr>
-              <a:t>リスク</a:t>
+              <a:t>サボり要素</a:t>
             </a:r>
             <a:r>
               <a:rPr kumimoji="1" lang="ja-JP" altLang="en-US" sz="3200" b="1" dirty="0">
@@ -7287,10 +8048,10 @@
       </p:sp>
       <p:sp>
         <p:nvSpPr>
-          <p:cNvPr id="9" name="テキスト ボックス 8">
-            <a:extLst>
-              <a:ext uri="{FF2B5EF4-FFF2-40B4-BE49-F238E27FC236}">
-                <a16:creationId xmlns:a16="http://schemas.microsoft.com/office/drawing/2014/main" id="{704DB3BE-AA2C-47D8-AA8B-F8491639A3B3}"/>
+          <p:cNvPr id="12" name="テキスト ボックス 11">
+            <a:extLst>
+              <a:ext uri="{FF2B5EF4-FFF2-40B4-BE49-F238E27FC236}">
+                <a16:creationId xmlns:a16="http://schemas.microsoft.com/office/drawing/2014/main" id="{B3B33B18-8685-367E-D5A0-E4AB4E100A87}"/>
               </a:ext>
             </a:extLst>
           </p:cNvPr>
@@ -7299,8 +8060,8 @@
         </p:nvSpPr>
         <p:spPr>
           <a:xfrm>
-            <a:off x="6236597" y="4055202"/>
-            <a:ext cx="2805803" cy="584775"/>
+            <a:off x="6354555" y="1772773"/>
+            <a:ext cx="5764871" cy="1815882"/>
           </a:xfrm>
           <a:prstGeom prst="rect">
             <a:avLst/>
@@ -7313,68 +8074,22 @@
           </a:bodyPr>
           <a:lstStyle/>
           <a:p>
-            <a:pPr algn="ctr"/>
-            <a:r>
-              <a:rPr kumimoji="1" lang="en-US" altLang="ja-JP" sz="3200" b="1" dirty="0">
-                <a:effectLst>
-                  <a:outerShdw blurRad="50800" dist="38100" dir="2700000" algn="tl" rotWithShape="0">
-                    <a:prstClr val="black">
-                      <a:alpha val="40000"/>
-                    </a:prstClr>
-                  </a:outerShdw>
-                </a:effectLst>
-              </a:rPr>
-              <a:t>&lt;</a:t>
-            </a:r>
-            <a:r>
-              <a:rPr kumimoji="1" lang="ja-JP" altLang="en-US" sz="3200" b="1" dirty="0">
-                <a:effectLst>
-                  <a:outerShdw blurRad="50800" dist="38100" dir="2700000" algn="tl" rotWithShape="0">
-                    <a:prstClr val="black">
-                      <a:alpha val="40000"/>
-                    </a:prstClr>
-                  </a:outerShdw>
-                </a:effectLst>
-              </a:rPr>
-              <a:t> </a:t>
-            </a:r>
-            <a:r>
-              <a:rPr lang="ja-JP" altLang="en-US" sz="3200" b="1" dirty="0">
-                <a:effectLst>
-                  <a:outerShdw blurRad="50800" dist="38100" dir="2700000" algn="tl" rotWithShape="0">
-                    <a:prstClr val="black">
-                      <a:alpha val="40000"/>
-                    </a:prstClr>
-                  </a:outerShdw>
-                </a:effectLst>
-              </a:rPr>
-              <a:t>リターン</a:t>
-            </a:r>
-            <a:r>
-              <a:rPr kumimoji="1" lang="ja-JP" altLang="en-US" sz="3200" b="1" dirty="0">
-                <a:effectLst>
-                  <a:outerShdw blurRad="50800" dist="38100" dir="2700000" algn="tl" rotWithShape="0">
-                    <a:prstClr val="black">
-                      <a:alpha val="40000"/>
-                    </a:prstClr>
-                  </a:outerShdw>
-                </a:effectLst>
-              </a:rPr>
-              <a:t> </a:t>
-            </a:r>
-            <a:r>
-              <a:rPr kumimoji="1" lang="en-US" altLang="ja-JP" sz="3200" b="1" dirty="0">
-                <a:effectLst>
-                  <a:outerShdw blurRad="50800" dist="38100" dir="2700000" algn="tl" rotWithShape="0">
-                    <a:prstClr val="black">
-                      <a:alpha val="40000"/>
-                    </a:prstClr>
-                  </a:outerShdw>
-                </a:effectLst>
-              </a:rPr>
-              <a:t>&gt;</a:t>
-            </a:r>
-            <a:endParaRPr kumimoji="1" lang="ja-JP" altLang="en-US" sz="3200" b="1" dirty="0">
+            <a:pPr>
+              <a:buSzPct val="50000"/>
+            </a:pPr>
+            <a:r>
+              <a:rPr kumimoji="1" lang="ja-JP" altLang="en-US" sz="2800" b="1" dirty="0">
+                <a:effectLst>
+                  <a:outerShdw blurRad="50800" dist="38100" dir="2700000" algn="tl" rotWithShape="0">
+                    <a:prstClr val="black">
+                      <a:alpha val="40000"/>
+                    </a:prstClr>
+                  </a:outerShdw>
+                </a:effectLst>
+              </a:rPr>
+              <a:t>・タバコを吸いに行く</a:t>
+            </a:r>
+            <a:endParaRPr kumimoji="1" lang="en-US" altLang="ja-JP" sz="2800" b="1" dirty="0">
               <a:effectLst>
                 <a:outerShdw blurRad="50800" dist="38100" dir="2700000" algn="tl" rotWithShape="0">
                   <a:prstClr val="black">
@@ -7384,49 +8099,23 @@
               </a:effectLst>
             </a:endParaRPr>
           </a:p>
-        </p:txBody>
-      </p:sp>
-      <p:sp>
-        <p:nvSpPr>
-          <p:cNvPr id="4" name="テキスト ボックス 3">
-            <a:extLst>
-              <a:ext uri="{FF2B5EF4-FFF2-40B4-BE49-F238E27FC236}">
-                <a16:creationId xmlns:a16="http://schemas.microsoft.com/office/drawing/2014/main" id="{0D199DD9-3025-540C-6931-D533803E42CC}"/>
-              </a:ext>
-            </a:extLst>
-          </p:cNvPr>
-          <p:cNvSpPr txBox="1"/>
-          <p:nvPr/>
-        </p:nvSpPr>
-        <p:spPr>
-          <a:xfrm>
-            <a:off x="5876440" y="1001708"/>
-            <a:ext cx="5897345" cy="2677656"/>
-          </a:xfrm>
-          <a:prstGeom prst="rect">
-            <a:avLst/>
-          </a:prstGeom>
-          <a:noFill/>
-        </p:spPr>
-        <p:txBody>
-          <a:bodyPr wrap="square" rtlCol="0">
-            <a:spAutoFit/>
-          </a:bodyPr>
-          <a:lstStyle/>
-          <a:p>
-            <a:r>
-              <a:rPr lang="ja-JP" altLang="en-US" sz="2400" b="1" dirty="0">
-                <a:effectLst>
-                  <a:outerShdw blurRad="50800" dist="38100" dir="2700000" algn="tl" rotWithShape="0">
-                    <a:prstClr val="black">
-                      <a:alpha val="40000"/>
-                    </a:prstClr>
-                  </a:outerShdw>
-                </a:effectLst>
-              </a:rPr>
-              <a:t>・サボりすぎる、又は​席を離れすぎると​</a:t>
-            </a:r>
-            <a:endParaRPr lang="en-US" altLang="ja-JP" sz="2400" b="1" dirty="0">
+          <a:p>
+            <a:pPr>
+              <a:buSzPct val="50000"/>
+            </a:pPr>
+            <a:r>
+              <a:rPr lang="ja-JP" altLang="en-US" sz="2800" b="1" dirty="0">
+                <a:effectLst>
+                  <a:outerShdw blurRad="50800" dist="38100" dir="2700000" algn="tl" rotWithShape="0">
+                    <a:prstClr val="black">
+                      <a:alpha val="40000"/>
+                    </a:prstClr>
+                  </a:outerShdw>
+                </a:effectLst>
+              </a:rPr>
+              <a:t>・雑誌を立ち読む</a:t>
+            </a:r>
+            <a:endParaRPr lang="en-US" altLang="ja-JP" sz="2800" b="1" dirty="0">
               <a:effectLst>
                 <a:outerShdw blurRad="50800" dist="38100" dir="2700000" algn="tl" rotWithShape="0">
                   <a:prstClr val="black">
@@ -7437,19 +8126,46 @@
             </a:endParaRPr>
           </a:p>
           <a:p>
-            <a:r>
-              <a:rPr lang="ja-JP" altLang="en-US" sz="2400" b="1" dirty="0">
-                <a:effectLst>
-                  <a:outerShdw blurRad="50800" dist="38100" dir="2700000" algn="tl" rotWithShape="0">
-                    <a:prstClr val="black">
-                      <a:alpha val="40000"/>
-                    </a:prstClr>
-                  </a:outerShdw>
-                </a:effectLst>
-              </a:rPr>
-              <a:t>　上司の警戒度が上がる​。</a:t>
-            </a:r>
-            <a:endParaRPr lang="en-US" altLang="ja-JP" sz="2400" b="1" dirty="0">
+            <a:pPr>
+              <a:buSzPct val="50000"/>
+            </a:pPr>
+            <a:r>
+              <a:rPr kumimoji="1" lang="ja-JP" altLang="en-US" sz="2800" b="1" dirty="0">
+                <a:effectLst>
+                  <a:outerShdw blurRad="50800" dist="38100" dir="2700000" algn="tl" rotWithShape="0">
+                    <a:prstClr val="black">
+                      <a:alpha val="40000"/>
+                    </a:prstClr>
+                  </a:outerShdw>
+                </a:effectLst>
+              </a:rPr>
+              <a:t>・</a:t>
+            </a:r>
+            <a:r>
+              <a:rPr kumimoji="1" lang="en-US" altLang="ja-JP" sz="2800" b="1" dirty="0">
+                <a:effectLst>
+                  <a:outerShdw blurRad="50800" dist="38100" dir="2700000" algn="tl" rotWithShape="0">
+                    <a:prstClr val="black">
+                      <a:alpha val="40000"/>
+                    </a:prstClr>
+                  </a:outerShdw>
+                </a:effectLst>
+              </a:rPr>
+              <a:t>SNS</a:t>
+            </a:r>
+            <a:r>
+              <a:rPr kumimoji="1" lang="ja-JP" altLang="en-US" sz="2800" b="1" dirty="0">
+                <a:effectLst>
+                  <a:outerShdw blurRad="50800" dist="38100" dir="2700000" algn="tl" rotWithShape="0">
+                    <a:prstClr val="black">
+                      <a:alpha val="40000"/>
+                    </a:prstClr>
+                  </a:outerShdw>
+                </a:effectLst>
+              </a:rPr>
+              <a:t>見る</a:t>
+            </a:r>
+            <a:endParaRPr kumimoji="1" lang="en-US" altLang="ja-JP" sz="2800" b="1" dirty="0">
               <a:effectLst>
                 <a:outerShdw blurRad="50800" dist="38100" dir="2700000" algn="tl" rotWithShape="0">
                   <a:prstClr val="black">
@@ -7460,351 +8176,22 @@
             </a:endParaRPr>
           </a:p>
           <a:p>
-            <a:r>
-              <a:rPr lang="ja-JP" altLang="en-US" sz="2400" b="1" dirty="0">
-                <a:effectLst>
-                  <a:outerShdw blurRad="50800" dist="38100" dir="2700000" algn="tl" rotWithShape="0">
-                    <a:prstClr val="black">
-                      <a:alpha val="40000"/>
-                    </a:prstClr>
-                  </a:outerShdw>
-                </a:effectLst>
-              </a:rPr>
-              <a:t>・サボりを注意を受け​、サボりの効率が</a:t>
-            </a:r>
-            <a:endParaRPr lang="en-US" altLang="ja-JP" sz="2400" b="1" dirty="0">
-              <a:effectLst>
-                <a:outerShdw blurRad="50800" dist="38100" dir="2700000" algn="tl" rotWithShape="0">
-                  <a:prstClr val="black">
-                    <a:alpha val="40000"/>
-                  </a:prstClr>
-                </a:outerShdw>
-              </a:effectLst>
-            </a:endParaRPr>
-          </a:p>
-          <a:p>
-            <a:r>
-              <a:rPr lang="ja-JP" altLang="en-US" sz="2400" b="1" dirty="0">
-                <a:effectLst>
-                  <a:outerShdw blurRad="50800" dist="38100" dir="2700000" algn="tl" rotWithShape="0">
-                    <a:prstClr val="black">
-                      <a:alpha val="40000"/>
-                    </a:prstClr>
-                  </a:outerShdw>
-                </a:effectLst>
-              </a:rPr>
-              <a:t>　落ちる​。</a:t>
-            </a:r>
-            <a:r>
-              <a:rPr lang="en-US" altLang="ja-JP" sz="2400" b="1" dirty="0">
-                <a:effectLst>
-                  <a:outerShdw blurRad="50800" dist="38100" dir="2700000" algn="tl" rotWithShape="0">
-                    <a:prstClr val="black">
-                      <a:alpha val="40000"/>
-                    </a:prstClr>
-                  </a:outerShdw>
-                </a:effectLst>
-              </a:rPr>
-              <a:t>2</a:t>
-            </a:r>
-            <a:r>
-              <a:rPr lang="ja-JP" altLang="en-US" sz="2400" b="1" dirty="0">
-                <a:effectLst>
-                  <a:outerShdw blurRad="50800" dist="38100" dir="2700000" algn="tl" rotWithShape="0">
-                    <a:prstClr val="black">
-                      <a:alpha val="40000"/>
-                    </a:prstClr>
-                  </a:outerShdw>
-                </a:effectLst>
-              </a:rPr>
-              <a:t>回目でゲームオーバー​</a:t>
-            </a:r>
-            <a:endParaRPr lang="en-US" altLang="ja-JP" sz="2400" b="1" dirty="0">
-              <a:effectLst>
-                <a:outerShdw blurRad="50800" dist="38100" dir="2700000" algn="tl" rotWithShape="0">
-                  <a:prstClr val="black">
-                    <a:alpha val="40000"/>
-                  </a:prstClr>
-                </a:outerShdw>
-              </a:effectLst>
-            </a:endParaRPr>
-          </a:p>
-          <a:p>
-            <a:r>
-              <a:rPr lang="ja-JP" altLang="en-US" sz="2400" b="1" dirty="0">
-                <a:effectLst>
-                  <a:outerShdw blurRad="50800" dist="38100" dir="2700000" algn="tl" rotWithShape="0">
-                    <a:prstClr val="black">
-                      <a:alpha val="40000"/>
-                    </a:prstClr>
-                  </a:outerShdw>
-                </a:effectLst>
-              </a:rPr>
-              <a:t>・チキってタスクをしすぎると、</a:t>
-            </a:r>
-            <a:endParaRPr lang="en-US" altLang="ja-JP" sz="2400" b="1" dirty="0">
-              <a:effectLst>
-                <a:outerShdw blurRad="50800" dist="38100" dir="2700000" algn="tl" rotWithShape="0">
-                  <a:prstClr val="black">
-                    <a:alpha val="40000"/>
-                  </a:prstClr>
-                </a:outerShdw>
-              </a:effectLst>
-            </a:endParaRPr>
-          </a:p>
-          <a:p>
-            <a:r>
-              <a:rPr lang="ja-JP" altLang="en-US" sz="2400" b="1" dirty="0">
-                <a:ln w="12700">
-                  <a:solidFill>
-                    <a:schemeClr val="tx1"/>
-                  </a:solidFill>
-                </a:ln>
-                <a:solidFill>
-                  <a:srgbClr val="FFC000"/>
-                </a:solidFill>
-                <a:effectLst>
-                  <a:outerShdw blurRad="50800" dist="38100" dir="2700000" algn="tl" rotWithShape="0">
-                    <a:prstClr val="black">
-                      <a:alpha val="40000"/>
-                    </a:prstClr>
-                  </a:outerShdw>
-                </a:effectLst>
-              </a:rPr>
-              <a:t>　サボリーマン</a:t>
-            </a:r>
-            <a:r>
-              <a:rPr lang="ja-JP" altLang="en-US" sz="2400" b="1" dirty="0">
-                <a:effectLst>
-                  <a:outerShdw blurRad="50800" dist="38100" dir="2700000" algn="tl" rotWithShape="0">
-                    <a:prstClr val="black">
-                      <a:alpha val="40000"/>
-                    </a:prstClr>
-                  </a:outerShdw>
-                </a:effectLst>
-              </a:rPr>
-              <a:t>にはなれない。</a:t>
-            </a:r>
-            <a:endParaRPr lang="en-US" altLang="ja-JP" sz="2400" b="1" dirty="0">
-              <a:effectLst>
-                <a:outerShdw blurRad="50800" dist="38100" dir="2700000" algn="tl" rotWithShape="0">
-                  <a:prstClr val="black">
-                    <a:alpha val="40000"/>
-                  </a:prstClr>
-                </a:outerShdw>
-              </a:effectLst>
-            </a:endParaRPr>
-          </a:p>
-          <a:p>
-            <a:r>
-              <a:rPr lang="ja-JP" altLang="en-US" sz="2400" b="1" dirty="0">
-                <a:ln w="12700">
-                  <a:solidFill>
-                    <a:schemeClr val="tx1"/>
-                  </a:solidFill>
-                </a:ln>
-                <a:solidFill>
-                  <a:schemeClr val="accent1"/>
-                </a:solidFill>
-                <a:effectLst>
-                  <a:outerShdw blurRad="50800" dist="38100" dir="2700000" algn="tl" rotWithShape="0">
-                    <a:prstClr val="black">
-                      <a:alpha val="40000"/>
-                    </a:prstClr>
-                  </a:outerShdw>
-                </a:effectLst>
-              </a:rPr>
-              <a:t>　サラリーマン</a:t>
-            </a:r>
-            <a:r>
-              <a:rPr lang="ja-JP" altLang="en-US" sz="2400" b="1" dirty="0">
-                <a:effectLst>
-                  <a:outerShdw blurRad="50800" dist="38100" dir="2700000" algn="tl" rotWithShape="0">
-                    <a:prstClr val="black">
-                      <a:alpha val="40000"/>
-                    </a:prstClr>
-                  </a:outerShdw>
-                </a:effectLst>
-              </a:rPr>
-              <a:t>になってしまう​</a:t>
-            </a:r>
-            <a:endParaRPr kumimoji="1" lang="ja-JP" altLang="en-US" sz="2400" b="1" dirty="0">
-              <a:effectLst>
-                <a:outerShdw blurRad="50800" dist="38100" dir="2700000" algn="tl" rotWithShape="0">
-                  <a:prstClr val="black">
-                    <a:alpha val="40000"/>
-                  </a:prstClr>
-                </a:outerShdw>
-              </a:effectLst>
-            </a:endParaRPr>
-          </a:p>
-        </p:txBody>
-      </p:sp>
-      <p:sp>
-        <p:nvSpPr>
-          <p:cNvPr id="10" name="テキスト ボックス 9">
-            <a:extLst>
-              <a:ext uri="{FF2B5EF4-FFF2-40B4-BE49-F238E27FC236}">
-                <a16:creationId xmlns:a16="http://schemas.microsoft.com/office/drawing/2014/main" id="{FD0EE871-DF4E-B5AE-4FF1-DA9CD67DEE4A}"/>
-              </a:ext>
-            </a:extLst>
-          </p:cNvPr>
-          <p:cNvSpPr txBox="1"/>
-          <p:nvPr/>
-        </p:nvSpPr>
-        <p:spPr>
-          <a:xfrm>
-            <a:off x="6147801" y="4753713"/>
-            <a:ext cx="6044199" cy="1938992"/>
-          </a:xfrm>
-          <a:prstGeom prst="rect">
-            <a:avLst/>
-          </a:prstGeom>
-          <a:noFill/>
-        </p:spPr>
-        <p:txBody>
-          <a:bodyPr wrap="square" rtlCol="0">
-            <a:spAutoFit/>
-          </a:bodyPr>
-          <a:lstStyle/>
-          <a:p>
-            <a:r>
-              <a:rPr lang="ja-JP" altLang="en-US" sz="2400" b="1" dirty="0">
-                <a:effectLst>
-                  <a:outerShdw blurRad="50800" dist="38100" dir="2700000" algn="tl" rotWithShape="0">
-                    <a:prstClr val="black">
-                      <a:alpha val="40000"/>
-                    </a:prstClr>
-                  </a:outerShdw>
-                </a:effectLst>
-              </a:rPr>
-              <a:t>・サボりの数をこなすと、</a:t>
-            </a:r>
-            <a:endParaRPr lang="en-US" altLang="ja-JP" sz="2400" b="1" dirty="0">
-              <a:effectLst>
-                <a:outerShdw blurRad="50800" dist="38100" dir="2700000" algn="tl" rotWithShape="0">
-                  <a:prstClr val="black">
-                    <a:alpha val="40000"/>
-                  </a:prstClr>
-                </a:outerShdw>
-              </a:effectLst>
-            </a:endParaRPr>
-          </a:p>
-          <a:p>
-            <a:r>
-              <a:rPr lang="ja-JP" altLang="en-US" sz="2400" b="1" dirty="0">
-                <a:effectLst>
-                  <a:outerShdw blurRad="50800" dist="38100" dir="2700000" algn="tl" rotWithShape="0">
-                    <a:prstClr val="black">
-                      <a:alpha val="40000"/>
-                    </a:prstClr>
-                  </a:outerShdw>
-                </a:effectLst>
-              </a:rPr>
-              <a:t>　</a:t>
-            </a:r>
-            <a:r>
-              <a:rPr lang="ja-JP" altLang="en-US" sz="2400" b="1" dirty="0">
-                <a:ln w="12700">
-                  <a:solidFill>
-                    <a:schemeClr val="tx1"/>
-                  </a:solidFill>
-                </a:ln>
-                <a:solidFill>
-                  <a:srgbClr val="FFC000"/>
-                </a:solidFill>
-                <a:effectLst>
-                  <a:outerShdw blurRad="50800" dist="38100" dir="2700000" algn="tl" rotWithShape="0">
-                    <a:prstClr val="black">
-                      <a:alpha val="40000"/>
-                    </a:prstClr>
-                  </a:outerShdw>
-                </a:effectLst>
-              </a:rPr>
-              <a:t>サボリーマン</a:t>
-            </a:r>
-            <a:r>
-              <a:rPr lang="ja-JP" altLang="en-US" sz="2400" b="1" dirty="0">
-                <a:effectLst>
-                  <a:outerShdw blurRad="50800" dist="38100" dir="2700000" algn="tl" rotWithShape="0">
-                    <a:prstClr val="black">
-                      <a:alpha val="40000"/>
-                    </a:prstClr>
-                  </a:outerShdw>
-                </a:effectLst>
-              </a:rPr>
-              <a:t>として一流になれる。​</a:t>
-            </a:r>
-            <a:endParaRPr lang="en-US" altLang="ja-JP" sz="2400" b="1" dirty="0">
-              <a:effectLst>
-                <a:outerShdw blurRad="50800" dist="38100" dir="2700000" algn="tl" rotWithShape="0">
-                  <a:prstClr val="black">
-                    <a:alpha val="40000"/>
-                  </a:prstClr>
-                </a:outerShdw>
-              </a:effectLst>
-            </a:endParaRPr>
-          </a:p>
-          <a:p>
-            <a:r>
-              <a:rPr lang="ja-JP" altLang="en-US" sz="2400" b="1" dirty="0">
-                <a:effectLst>
-                  <a:outerShdw blurRad="50800" dist="38100" dir="2700000" algn="tl" rotWithShape="0">
-                    <a:prstClr val="black">
-                      <a:alpha val="40000"/>
-                    </a:prstClr>
-                  </a:outerShdw>
-                </a:effectLst>
-              </a:rPr>
-              <a:t>・席を離れると、サボりのバリエーション　　　</a:t>
-            </a:r>
-            <a:endParaRPr lang="en-US" altLang="ja-JP" sz="2400" b="1" dirty="0">
-              <a:effectLst>
-                <a:outerShdw blurRad="50800" dist="38100" dir="2700000" algn="tl" rotWithShape="0">
-                  <a:prstClr val="black">
-                    <a:alpha val="40000"/>
-                  </a:prstClr>
-                </a:outerShdw>
-              </a:effectLst>
-            </a:endParaRPr>
-          </a:p>
-          <a:p>
-            <a:r>
-              <a:rPr lang="ja-JP" altLang="en-US" sz="2400" b="1" dirty="0">
-                <a:effectLst>
-                  <a:outerShdw blurRad="50800" dist="38100" dir="2700000" algn="tl" rotWithShape="0">
-                    <a:prstClr val="black">
-                      <a:alpha val="40000"/>
-                    </a:prstClr>
-                  </a:outerShdw>
-                </a:effectLst>
-              </a:rPr>
-              <a:t>　が増える。</a:t>
-            </a:r>
-            <a:endParaRPr lang="en-US" altLang="ja-JP" sz="2400" b="1" dirty="0">
-              <a:effectLst>
-                <a:outerShdw blurRad="50800" dist="38100" dir="2700000" algn="tl" rotWithShape="0">
-                  <a:prstClr val="black">
-                    <a:alpha val="40000"/>
-                  </a:prstClr>
-                </a:outerShdw>
-              </a:effectLst>
-            </a:endParaRPr>
-          </a:p>
-          <a:p>
-            <a:r>
-              <a:rPr lang="ja-JP" altLang="en-US" sz="2400" b="1" dirty="0">
-                <a:effectLst>
-                  <a:outerShdw blurRad="50800" dist="38100" dir="2700000" algn="tl" rotWithShape="0">
-                    <a:prstClr val="black">
-                      <a:alpha val="40000"/>
-                    </a:prstClr>
-                  </a:outerShdw>
-                </a:effectLst>
-              </a:rPr>
-              <a:t>・タスクをすると、上司の警戒度が下がる</a:t>
-            </a:r>
-            <a:endParaRPr kumimoji="1" lang="ja-JP" altLang="en-US" sz="2400" b="1" dirty="0">
+            <a:pPr>
+              <a:buSzPct val="50000"/>
+            </a:pPr>
+            <a:r>
+              <a:rPr lang="ja-JP" altLang="en-US" sz="2800" b="1" dirty="0">
+                <a:effectLst>
+                  <a:outerShdw blurRad="50800" dist="38100" dir="2700000" algn="tl" rotWithShape="0">
+                    <a:prstClr val="black">
+                      <a:alpha val="40000"/>
+                    </a:prstClr>
+                  </a:outerShdw>
+                </a:effectLst>
+              </a:rPr>
+              <a:t>・飲食する</a:t>
+            </a:r>
+            <a:endParaRPr lang="en-US" altLang="ja-JP" sz="2800" b="1" dirty="0">
               <a:effectLst>
                 <a:outerShdw blurRad="50800" dist="38100" dir="2700000" algn="tl" rotWithShape="0">
                   <a:prstClr val="black">
@@ -7848,10 +8235,10 @@
       </p:grpSpPr>
       <p:sp>
         <p:nvSpPr>
-          <p:cNvPr id="2" name="テキスト ボックス 1">
-            <a:extLst>
-              <a:ext uri="{FF2B5EF4-FFF2-40B4-BE49-F238E27FC236}">
-                <a16:creationId xmlns:a16="http://schemas.microsoft.com/office/drawing/2014/main" id="{E615B033-9532-CB56-9A15-4C4D08C03A1A}"/>
+          <p:cNvPr id="4" name="テキスト ボックス 3">
+            <a:extLst>
+              <a:ext uri="{FF2B5EF4-FFF2-40B4-BE49-F238E27FC236}">
+                <a16:creationId xmlns:a16="http://schemas.microsoft.com/office/drawing/2014/main" id="{20675B08-C2FB-874A-556E-3983015CDF16}"/>
               </a:ext>
             </a:extLst>
           </p:cNvPr>
@@ -7860,8 +8247,8 @@
         </p:nvSpPr>
         <p:spPr>
           <a:xfrm>
-            <a:off x="-835001" y="203385"/>
-            <a:ext cx="6519876" cy="707886"/>
+            <a:off x="-885801" y="356920"/>
+            <a:ext cx="6118202" cy="707886"/>
           </a:xfrm>
           <a:prstGeom prst="rect">
             <a:avLst/>
@@ -7885,7 +8272,7 @@
                   </a:outerShdw>
                 </a:effectLst>
               </a:rPr>
-              <a:t>　　　アピールポイント</a:t>
+              <a:t>　　　リスクとリターン</a:t>
             </a:r>
             <a:endParaRPr kumimoji="1" lang="en-US" altLang="ja-JP" sz="4000" b="1" u="sng" dirty="0">
               <a:effectLst>
@@ -7901,10 +8288,10 @@
       </p:sp>
       <p:sp>
         <p:nvSpPr>
-          <p:cNvPr id="4" name="テキスト ボックス 3">
-            <a:extLst>
-              <a:ext uri="{FF2B5EF4-FFF2-40B4-BE49-F238E27FC236}">
-                <a16:creationId xmlns:a16="http://schemas.microsoft.com/office/drawing/2014/main" id="{91C1BEBA-2561-B298-21FD-4A0682067230}"/>
+          <p:cNvPr id="8" name="テキスト ボックス 7">
+            <a:extLst>
+              <a:ext uri="{FF2B5EF4-FFF2-40B4-BE49-F238E27FC236}">
+                <a16:creationId xmlns:a16="http://schemas.microsoft.com/office/drawing/2014/main" id="{A48829C8-87BD-8742-D769-087B35A48A1D}"/>
               </a:ext>
             </a:extLst>
           </p:cNvPr>
@@ -7913,8 +8300,8 @@
         </p:nvSpPr>
         <p:spPr>
           <a:xfrm>
-            <a:off x="148854" y="1453118"/>
-            <a:ext cx="10703444" cy="1077218"/>
+            <a:off x="475428" y="1135248"/>
+            <a:ext cx="2312316" cy="584775"/>
           </a:xfrm>
           <a:prstGeom prst="rect">
             <a:avLst/>
@@ -7927,6 +8314,19 @@
           </a:bodyPr>
           <a:lstStyle/>
           <a:p>
+            <a:pPr algn="ctr"/>
+            <a:r>
+              <a:rPr kumimoji="1" lang="en-US" altLang="ja-JP" sz="3200" b="1" dirty="0">
+                <a:effectLst>
+                  <a:outerShdw blurRad="50800" dist="38100" dir="2700000" algn="tl" rotWithShape="0">
+                    <a:prstClr val="black">
+                      <a:alpha val="40000"/>
+                    </a:prstClr>
+                  </a:outerShdw>
+                </a:effectLst>
+              </a:rPr>
+              <a:t>&lt;</a:t>
+            </a:r>
             <a:r>
               <a:rPr kumimoji="1" lang="ja-JP" altLang="en-US" sz="3200" b="1" dirty="0">
                 <a:effectLst>
@@ -7937,19 +8337,8 @@
                   </a:outerShdw>
                 </a:effectLst>
               </a:rPr>
-              <a:t>・攻めれば攻めるほど、上司にバレる危険性もあるが、</a:t>
-            </a:r>
-            <a:endParaRPr kumimoji="1" lang="en-US" altLang="ja-JP" sz="3200" b="1" dirty="0">
-              <a:effectLst>
-                <a:outerShdw blurRad="50800" dist="38100" dir="2700000" algn="tl" rotWithShape="0">
-                  <a:prstClr val="black">
-                    <a:alpha val="40000"/>
-                  </a:prstClr>
-                </a:outerShdw>
-              </a:effectLst>
-            </a:endParaRPr>
-          </a:p>
-          <a:p>
+              <a:t> </a:t>
+            </a:r>
             <a:r>
               <a:rPr lang="ja-JP" altLang="en-US" sz="3200" b="1" dirty="0">
                 <a:effectLst>
@@ -7960,7 +8349,7 @@
                   </a:outerShdw>
                 </a:effectLst>
               </a:rPr>
-              <a:t>　</a:t>
+              <a:t>リスク</a:t>
             </a:r>
             <a:r>
               <a:rPr kumimoji="1" lang="ja-JP" altLang="en-US" sz="3200" b="1" dirty="0">
@@ -7972,136 +8361,7 @@
                   </a:outerShdw>
                 </a:effectLst>
               </a:rPr>
-              <a:t>ギリギリバレなかった時の気持ちよさがある</a:t>
-            </a:r>
-          </a:p>
-        </p:txBody>
-      </p:sp>
-      <p:sp>
-        <p:nvSpPr>
-          <p:cNvPr id="5" name="テキスト ボックス 4">
-            <a:extLst>
-              <a:ext uri="{FF2B5EF4-FFF2-40B4-BE49-F238E27FC236}">
-                <a16:creationId xmlns:a16="http://schemas.microsoft.com/office/drawing/2014/main" id="{15BAA95B-ABA0-F197-5D53-E070DE431172}"/>
-              </a:ext>
-            </a:extLst>
-          </p:cNvPr>
-          <p:cNvSpPr txBox="1"/>
-          <p:nvPr/>
-        </p:nvSpPr>
-        <p:spPr>
-          <a:xfrm>
-            <a:off x="148854" y="2890391"/>
-            <a:ext cx="8399723" cy="584775"/>
-          </a:xfrm>
-          <a:prstGeom prst="rect">
-            <a:avLst/>
-          </a:prstGeom>
-          <a:noFill/>
-        </p:spPr>
-        <p:txBody>
-          <a:bodyPr wrap="square" rtlCol="0">
-            <a:spAutoFit/>
-          </a:bodyPr>
-          <a:lstStyle/>
-          <a:p>
-            <a:r>
-              <a:rPr kumimoji="1" lang="ja-JP" altLang="en-US" sz="3200" b="1" dirty="0">
-                <a:effectLst>
-                  <a:outerShdw blurRad="50800" dist="38100" dir="2700000" algn="tl" rotWithShape="0">
-                    <a:prstClr val="black">
-                      <a:alpha val="40000"/>
-                    </a:prstClr>
-                  </a:outerShdw>
-                </a:effectLst>
-              </a:rPr>
-              <a:t>・いろんなサボりを連続で出来た時のテンポ</a:t>
-            </a:r>
-          </a:p>
-        </p:txBody>
-      </p:sp>
-      <p:sp>
-        <p:nvSpPr>
-          <p:cNvPr id="6" name="テキスト ボックス 5">
-            <a:extLst>
-              <a:ext uri="{FF2B5EF4-FFF2-40B4-BE49-F238E27FC236}">
-                <a16:creationId xmlns:a16="http://schemas.microsoft.com/office/drawing/2014/main" id="{971FDF92-7871-515E-98BC-A610615185AA}"/>
-              </a:ext>
-            </a:extLst>
-          </p:cNvPr>
-          <p:cNvSpPr txBox="1"/>
-          <p:nvPr/>
-        </p:nvSpPr>
-        <p:spPr>
-          <a:xfrm>
-            <a:off x="148855" y="4077694"/>
-            <a:ext cx="3111796" cy="584775"/>
-          </a:xfrm>
-          <a:prstGeom prst="rect">
-            <a:avLst/>
-          </a:prstGeom>
-          <a:noFill/>
-        </p:spPr>
-        <p:txBody>
-          <a:bodyPr wrap="square" rtlCol="0">
-            <a:spAutoFit/>
-          </a:bodyPr>
-          <a:lstStyle/>
-          <a:p>
-            <a:r>
-              <a:rPr kumimoji="1" lang="ja-JP" altLang="en-US" sz="3200" b="1" dirty="0">
-                <a:effectLst>
-                  <a:outerShdw blurRad="50800" dist="38100" dir="2700000" algn="tl" rotWithShape="0">
-                    <a:prstClr val="black">
-                      <a:alpha val="40000"/>
-                    </a:prstClr>
-                  </a:outerShdw>
-                </a:effectLst>
-              </a:rPr>
-              <a:t>・簡単な操作</a:t>
-            </a:r>
-          </a:p>
-        </p:txBody>
-      </p:sp>
-      <p:sp>
-        <p:nvSpPr>
-          <p:cNvPr id="8" name="テキスト ボックス 7">
-            <a:extLst>
-              <a:ext uri="{FF2B5EF4-FFF2-40B4-BE49-F238E27FC236}">
-                <a16:creationId xmlns:a16="http://schemas.microsoft.com/office/drawing/2014/main" id="{A5CDCA9B-6921-0D71-CC84-04496DA6FD5A}"/>
-              </a:ext>
-            </a:extLst>
-          </p:cNvPr>
-          <p:cNvSpPr txBox="1"/>
-          <p:nvPr/>
-        </p:nvSpPr>
-        <p:spPr>
-          <a:xfrm>
-            <a:off x="148854" y="5264997"/>
-            <a:ext cx="8839202" cy="584775"/>
-          </a:xfrm>
-          <a:prstGeom prst="rect">
-            <a:avLst/>
-          </a:prstGeom>
-          <a:noFill/>
-        </p:spPr>
-        <p:txBody>
-          <a:bodyPr wrap="square" rtlCol="0">
-            <a:spAutoFit/>
-          </a:bodyPr>
-          <a:lstStyle/>
-          <a:p>
-            <a:r>
-              <a:rPr kumimoji="1" lang="ja-JP" altLang="en-US" sz="3200" b="1" dirty="0">
-                <a:effectLst>
-                  <a:outerShdw blurRad="50800" dist="38100" dir="2700000" algn="tl" rotWithShape="0">
-                    <a:prstClr val="black">
-                      <a:alpha val="40000"/>
-                    </a:prstClr>
-                  </a:outerShdw>
-                </a:effectLst>
-              </a:rPr>
-              <a:t>・言葉がいらない</a:t>
+              <a:t> </a:t>
             </a:r>
             <a:r>
               <a:rPr kumimoji="1" lang="en-US" altLang="ja-JP" sz="3200" b="1" dirty="0">
@@ -8113,31 +8373,7 @@
                   </a:outerShdw>
                 </a:effectLst>
               </a:rPr>
-              <a:t>(</a:t>
-            </a:r>
-            <a:r>
-              <a:rPr kumimoji="1" lang="ja-JP" altLang="en-US" sz="3200" b="1" dirty="0">
-                <a:effectLst>
-                  <a:outerShdw blurRad="50800" dist="38100" dir="2700000" algn="tl" rotWithShape="0">
-                    <a:prstClr val="black">
-                      <a:alpha val="40000"/>
-                    </a:prstClr>
-                  </a:outerShdw>
-                </a:effectLst>
-              </a:rPr>
-              <a:t>言葉がなくても楽しめる</a:t>
-            </a:r>
-            <a:r>
-              <a:rPr kumimoji="1" lang="en-US" altLang="ja-JP" sz="3200" b="1" dirty="0">
-                <a:effectLst>
-                  <a:outerShdw blurRad="50800" dist="38100" dir="2700000" algn="tl" rotWithShape="0">
-                    <a:prstClr val="black">
-                      <a:alpha val="40000"/>
-                    </a:prstClr>
-                  </a:outerShdw>
-                </a:effectLst>
-              </a:rPr>
-              <a:t>)</a:t>
+              <a:t>&gt;</a:t>
             </a:r>
             <a:endParaRPr kumimoji="1" lang="ja-JP" altLang="en-US" sz="3200" b="1" dirty="0">
               <a:effectLst>
@@ -8151,10 +8387,507 @@
           </a:p>
         </p:txBody>
       </p:sp>
+      <p:sp>
+        <p:nvSpPr>
+          <p:cNvPr id="9" name="テキスト ボックス 8">
+            <a:extLst>
+              <a:ext uri="{FF2B5EF4-FFF2-40B4-BE49-F238E27FC236}">
+                <a16:creationId xmlns:a16="http://schemas.microsoft.com/office/drawing/2014/main" id="{704DB3BE-AA2C-47D8-AA8B-F8491639A3B3}"/>
+              </a:ext>
+            </a:extLst>
+          </p:cNvPr>
+          <p:cNvSpPr txBox="1"/>
+          <p:nvPr/>
+        </p:nvSpPr>
+        <p:spPr>
+          <a:xfrm>
+            <a:off x="475428" y="4026456"/>
+            <a:ext cx="2805803" cy="584775"/>
+          </a:xfrm>
+          <a:prstGeom prst="rect">
+            <a:avLst/>
+          </a:prstGeom>
+          <a:noFill/>
+        </p:spPr>
+        <p:txBody>
+          <a:bodyPr wrap="square" rtlCol="0">
+            <a:spAutoFit/>
+          </a:bodyPr>
+          <a:lstStyle/>
+          <a:p>
+            <a:pPr algn="ctr"/>
+            <a:r>
+              <a:rPr kumimoji="1" lang="en-US" altLang="ja-JP" sz="3200" b="1" dirty="0">
+                <a:effectLst>
+                  <a:outerShdw blurRad="50800" dist="38100" dir="2700000" algn="tl" rotWithShape="0">
+                    <a:prstClr val="black">
+                      <a:alpha val="40000"/>
+                    </a:prstClr>
+                  </a:outerShdw>
+                </a:effectLst>
+              </a:rPr>
+              <a:t>&lt;</a:t>
+            </a:r>
+            <a:r>
+              <a:rPr kumimoji="1" lang="ja-JP" altLang="en-US" sz="3200" b="1" dirty="0">
+                <a:effectLst>
+                  <a:outerShdw blurRad="50800" dist="38100" dir="2700000" algn="tl" rotWithShape="0">
+                    <a:prstClr val="black">
+                      <a:alpha val="40000"/>
+                    </a:prstClr>
+                  </a:outerShdw>
+                </a:effectLst>
+              </a:rPr>
+              <a:t> </a:t>
+            </a:r>
+            <a:r>
+              <a:rPr lang="ja-JP" altLang="en-US" sz="3200" b="1" dirty="0">
+                <a:effectLst>
+                  <a:outerShdw blurRad="50800" dist="38100" dir="2700000" algn="tl" rotWithShape="0">
+                    <a:prstClr val="black">
+                      <a:alpha val="40000"/>
+                    </a:prstClr>
+                  </a:outerShdw>
+                </a:effectLst>
+              </a:rPr>
+              <a:t>リターン</a:t>
+            </a:r>
+            <a:r>
+              <a:rPr kumimoji="1" lang="ja-JP" altLang="en-US" sz="3200" b="1" dirty="0">
+                <a:effectLst>
+                  <a:outerShdw blurRad="50800" dist="38100" dir="2700000" algn="tl" rotWithShape="0">
+                    <a:prstClr val="black">
+                      <a:alpha val="40000"/>
+                    </a:prstClr>
+                  </a:outerShdw>
+                </a:effectLst>
+              </a:rPr>
+              <a:t> </a:t>
+            </a:r>
+            <a:r>
+              <a:rPr kumimoji="1" lang="en-US" altLang="ja-JP" sz="3200" b="1" dirty="0">
+                <a:effectLst>
+                  <a:outerShdw blurRad="50800" dist="38100" dir="2700000" algn="tl" rotWithShape="0">
+                    <a:prstClr val="black">
+                      <a:alpha val="40000"/>
+                    </a:prstClr>
+                  </a:outerShdw>
+                </a:effectLst>
+              </a:rPr>
+              <a:t>&gt;</a:t>
+            </a:r>
+            <a:endParaRPr kumimoji="1" lang="ja-JP" altLang="en-US" sz="3200" b="1" dirty="0">
+              <a:effectLst>
+                <a:outerShdw blurRad="50800" dist="38100" dir="2700000" algn="tl" rotWithShape="0">
+                  <a:prstClr val="black">
+                    <a:alpha val="40000"/>
+                  </a:prstClr>
+                </a:outerShdw>
+              </a:effectLst>
+            </a:endParaRPr>
+          </a:p>
+        </p:txBody>
+      </p:sp>
+      <p:sp>
+        <p:nvSpPr>
+          <p:cNvPr id="5" name="テキスト ボックス 4">
+            <a:extLst>
+              <a:ext uri="{FF2B5EF4-FFF2-40B4-BE49-F238E27FC236}">
+                <a16:creationId xmlns:a16="http://schemas.microsoft.com/office/drawing/2014/main" id="{0D199DD9-3025-540C-6931-D533803E42CC}"/>
+              </a:ext>
+            </a:extLst>
+          </p:cNvPr>
+          <p:cNvSpPr txBox="1"/>
+          <p:nvPr/>
+        </p:nvSpPr>
+        <p:spPr>
+          <a:xfrm>
+            <a:off x="700398" y="1708159"/>
+            <a:ext cx="10286916" cy="2246769"/>
+          </a:xfrm>
+          <a:prstGeom prst="rect">
+            <a:avLst/>
+          </a:prstGeom>
+          <a:noFill/>
+        </p:spPr>
+        <p:txBody>
+          <a:bodyPr wrap="square" rtlCol="0">
+            <a:spAutoFit/>
+          </a:bodyPr>
+          <a:lstStyle/>
+          <a:p>
+            <a:r>
+              <a:rPr lang="ja-JP" altLang="en-US" sz="2800" b="1" dirty="0">
+                <a:effectLst>
+                  <a:outerShdw blurRad="50800" dist="38100" dir="2700000" algn="tl" rotWithShape="0">
+                    <a:prstClr val="black">
+                      <a:alpha val="40000"/>
+                    </a:prstClr>
+                  </a:outerShdw>
+                </a:effectLst>
+              </a:rPr>
+              <a:t>・サボりすぎる、又は​席を離れすぎると​上司の警戒度が上がる​。</a:t>
+            </a:r>
+            <a:endParaRPr lang="en-US" altLang="ja-JP" sz="2800" b="1" dirty="0">
+              <a:effectLst>
+                <a:outerShdw blurRad="50800" dist="38100" dir="2700000" algn="tl" rotWithShape="0">
+                  <a:prstClr val="black">
+                    <a:alpha val="40000"/>
+                  </a:prstClr>
+                </a:outerShdw>
+              </a:effectLst>
+            </a:endParaRPr>
+          </a:p>
+          <a:p>
+            <a:r>
+              <a:rPr lang="ja-JP" altLang="en-US" sz="2800" b="1" dirty="0">
+                <a:effectLst>
+                  <a:outerShdw blurRad="50800" dist="38100" dir="2700000" algn="tl" rotWithShape="0">
+                    <a:prstClr val="black">
+                      <a:alpha val="40000"/>
+                    </a:prstClr>
+                  </a:outerShdw>
+                </a:effectLst>
+              </a:rPr>
+              <a:t>・サボりを注意を受け​、サボりの効率が落ちる​。</a:t>
+            </a:r>
+            <a:endParaRPr lang="en-US" altLang="ja-JP" sz="2800" b="1" dirty="0">
+              <a:effectLst>
+                <a:outerShdw blurRad="50800" dist="38100" dir="2700000" algn="tl" rotWithShape="0">
+                  <a:prstClr val="black">
+                    <a:alpha val="40000"/>
+                  </a:prstClr>
+                </a:outerShdw>
+              </a:effectLst>
+            </a:endParaRPr>
+          </a:p>
+          <a:p>
+            <a:r>
+              <a:rPr lang="ja-JP" altLang="en-US" sz="2800" b="1" dirty="0">
+                <a:effectLst>
+                  <a:outerShdw blurRad="50800" dist="38100" dir="2700000" algn="tl" rotWithShape="0">
+                    <a:prstClr val="black">
+                      <a:alpha val="40000"/>
+                    </a:prstClr>
+                  </a:outerShdw>
+                </a:effectLst>
+              </a:rPr>
+              <a:t>　</a:t>
+            </a:r>
+            <a:r>
+              <a:rPr lang="en-US" altLang="ja-JP" sz="2800" b="1" dirty="0">
+                <a:effectLst>
+                  <a:outerShdw blurRad="50800" dist="38100" dir="2700000" algn="tl" rotWithShape="0">
+                    <a:prstClr val="black">
+                      <a:alpha val="40000"/>
+                    </a:prstClr>
+                  </a:outerShdw>
+                </a:effectLst>
+              </a:rPr>
+              <a:t>2</a:t>
+            </a:r>
+            <a:r>
+              <a:rPr lang="ja-JP" altLang="en-US" sz="2800" b="1" dirty="0">
+                <a:effectLst>
+                  <a:outerShdw blurRad="50800" dist="38100" dir="2700000" algn="tl" rotWithShape="0">
+                    <a:prstClr val="black">
+                      <a:alpha val="40000"/>
+                    </a:prstClr>
+                  </a:outerShdw>
+                </a:effectLst>
+              </a:rPr>
+              <a:t>回目でゲームオーバー​</a:t>
+            </a:r>
+            <a:endParaRPr lang="en-US" altLang="ja-JP" sz="2800" b="1" dirty="0">
+              <a:effectLst>
+                <a:outerShdw blurRad="50800" dist="38100" dir="2700000" algn="tl" rotWithShape="0">
+                  <a:prstClr val="black">
+                    <a:alpha val="40000"/>
+                  </a:prstClr>
+                </a:outerShdw>
+              </a:effectLst>
+            </a:endParaRPr>
+          </a:p>
+          <a:p>
+            <a:r>
+              <a:rPr lang="ja-JP" altLang="en-US" sz="2800" b="1" dirty="0">
+                <a:effectLst>
+                  <a:outerShdw blurRad="50800" dist="38100" dir="2700000" algn="tl" rotWithShape="0">
+                    <a:prstClr val="black">
+                      <a:alpha val="40000"/>
+                    </a:prstClr>
+                  </a:outerShdw>
+                </a:effectLst>
+              </a:rPr>
+              <a:t>・チキってタスクをしすぎると、</a:t>
+            </a:r>
+            <a:r>
+              <a:rPr lang="ja-JP" altLang="en-US" sz="2800" b="1" dirty="0">
+                <a:ln w="12700">
+                  <a:solidFill>
+                    <a:schemeClr val="tx1"/>
+                  </a:solidFill>
+                </a:ln>
+                <a:solidFill>
+                  <a:srgbClr val="FFC000"/>
+                </a:solidFill>
+                <a:effectLst>
+                  <a:outerShdw blurRad="50800" dist="38100" dir="2700000" algn="tl" rotWithShape="0">
+                    <a:prstClr val="black">
+                      <a:alpha val="40000"/>
+                    </a:prstClr>
+                  </a:outerShdw>
+                </a:effectLst>
+              </a:rPr>
+              <a:t>サボリーマン</a:t>
+            </a:r>
+            <a:r>
+              <a:rPr lang="ja-JP" altLang="en-US" sz="2800" b="1" dirty="0">
+                <a:effectLst>
+                  <a:outerShdw blurRad="50800" dist="38100" dir="2700000" algn="tl" rotWithShape="0">
+                    <a:prstClr val="black">
+                      <a:alpha val="40000"/>
+                    </a:prstClr>
+                  </a:outerShdw>
+                </a:effectLst>
+              </a:rPr>
+              <a:t>にはなれない。</a:t>
+            </a:r>
+            <a:endParaRPr lang="en-US" altLang="ja-JP" sz="2800" b="1" dirty="0">
+              <a:effectLst>
+                <a:outerShdw blurRad="50800" dist="38100" dir="2700000" algn="tl" rotWithShape="0">
+                  <a:prstClr val="black">
+                    <a:alpha val="40000"/>
+                  </a:prstClr>
+                </a:outerShdw>
+              </a:effectLst>
+            </a:endParaRPr>
+          </a:p>
+          <a:p>
+            <a:r>
+              <a:rPr lang="ja-JP" altLang="en-US" sz="2800" b="1" dirty="0">
+                <a:ln w="12700">
+                  <a:solidFill>
+                    <a:schemeClr val="tx1"/>
+                  </a:solidFill>
+                </a:ln>
+                <a:solidFill>
+                  <a:schemeClr val="accent1"/>
+                </a:solidFill>
+                <a:effectLst>
+                  <a:outerShdw blurRad="50800" dist="38100" dir="2700000" algn="tl" rotWithShape="0">
+                    <a:prstClr val="black">
+                      <a:alpha val="40000"/>
+                    </a:prstClr>
+                  </a:outerShdw>
+                </a:effectLst>
+              </a:rPr>
+              <a:t>　サラリーマン</a:t>
+            </a:r>
+            <a:r>
+              <a:rPr lang="ja-JP" altLang="en-US" sz="2800" b="1" dirty="0">
+                <a:effectLst>
+                  <a:outerShdw blurRad="50800" dist="38100" dir="2700000" algn="tl" rotWithShape="0">
+                    <a:prstClr val="black">
+                      <a:alpha val="40000"/>
+                    </a:prstClr>
+                  </a:outerShdw>
+                </a:effectLst>
+              </a:rPr>
+              <a:t>になってしまう​</a:t>
+            </a:r>
+            <a:endParaRPr kumimoji="1" lang="ja-JP" altLang="en-US" sz="2800" b="1" dirty="0">
+              <a:effectLst>
+                <a:outerShdw blurRad="50800" dist="38100" dir="2700000" algn="tl" rotWithShape="0">
+                  <a:prstClr val="black">
+                    <a:alpha val="40000"/>
+                  </a:prstClr>
+                </a:outerShdw>
+              </a:effectLst>
+            </a:endParaRPr>
+          </a:p>
+        </p:txBody>
+      </p:sp>
+      <p:sp>
+        <p:nvSpPr>
+          <p:cNvPr id="10" name="テキスト ボックス 9">
+            <a:extLst>
+              <a:ext uri="{FF2B5EF4-FFF2-40B4-BE49-F238E27FC236}">
+                <a16:creationId xmlns:a16="http://schemas.microsoft.com/office/drawing/2014/main" id="{FD0EE871-DF4E-B5AE-4FF1-DA9CD67DEE4A}"/>
+              </a:ext>
+            </a:extLst>
+          </p:cNvPr>
+          <p:cNvSpPr txBox="1"/>
+          <p:nvPr/>
+        </p:nvSpPr>
+        <p:spPr>
+          <a:xfrm>
+            <a:off x="700398" y="4676284"/>
+            <a:ext cx="7444828" cy="2246769"/>
+          </a:xfrm>
+          <a:prstGeom prst="rect">
+            <a:avLst/>
+          </a:prstGeom>
+          <a:noFill/>
+        </p:spPr>
+        <p:txBody>
+          <a:bodyPr wrap="square" rtlCol="0">
+            <a:spAutoFit/>
+          </a:bodyPr>
+          <a:lstStyle/>
+          <a:p>
+            <a:r>
+              <a:rPr lang="ja-JP" altLang="en-US" sz="2800" b="1" dirty="0">
+                <a:effectLst>
+                  <a:outerShdw blurRad="50800" dist="38100" dir="2700000" algn="tl" rotWithShape="0">
+                    <a:prstClr val="black">
+                      <a:alpha val="40000"/>
+                    </a:prstClr>
+                  </a:outerShdw>
+                </a:effectLst>
+              </a:rPr>
+              <a:t>・サボりの数をこなすと、</a:t>
+            </a:r>
+            <a:endParaRPr lang="en-US" altLang="ja-JP" sz="2800" b="1" dirty="0">
+              <a:effectLst>
+                <a:outerShdw blurRad="50800" dist="38100" dir="2700000" algn="tl" rotWithShape="0">
+                  <a:prstClr val="black">
+                    <a:alpha val="40000"/>
+                  </a:prstClr>
+                </a:outerShdw>
+              </a:effectLst>
+            </a:endParaRPr>
+          </a:p>
+          <a:p>
+            <a:r>
+              <a:rPr lang="ja-JP" altLang="en-US" sz="2800" b="1" dirty="0">
+                <a:effectLst>
+                  <a:outerShdw blurRad="50800" dist="38100" dir="2700000" algn="tl" rotWithShape="0">
+                    <a:prstClr val="black">
+                      <a:alpha val="40000"/>
+                    </a:prstClr>
+                  </a:outerShdw>
+                </a:effectLst>
+              </a:rPr>
+              <a:t>　</a:t>
+            </a:r>
+            <a:r>
+              <a:rPr lang="ja-JP" altLang="en-US" sz="2800" b="1" dirty="0">
+                <a:ln w="12700">
+                  <a:solidFill>
+                    <a:schemeClr val="tx1"/>
+                  </a:solidFill>
+                </a:ln>
+                <a:solidFill>
+                  <a:srgbClr val="FFC000"/>
+                </a:solidFill>
+                <a:effectLst>
+                  <a:outerShdw blurRad="50800" dist="38100" dir="2700000" algn="tl" rotWithShape="0">
+                    <a:prstClr val="black">
+                      <a:alpha val="40000"/>
+                    </a:prstClr>
+                  </a:outerShdw>
+                </a:effectLst>
+              </a:rPr>
+              <a:t>サボリーマン</a:t>
+            </a:r>
+            <a:r>
+              <a:rPr lang="ja-JP" altLang="en-US" sz="2800" b="1" dirty="0">
+                <a:effectLst>
+                  <a:outerShdw blurRad="50800" dist="38100" dir="2700000" algn="tl" rotWithShape="0">
+                    <a:prstClr val="black">
+                      <a:alpha val="40000"/>
+                    </a:prstClr>
+                  </a:outerShdw>
+                </a:effectLst>
+              </a:rPr>
+              <a:t>として一流になれる。​</a:t>
+            </a:r>
+            <a:endParaRPr lang="en-US" altLang="ja-JP" sz="2800" b="1" dirty="0">
+              <a:effectLst>
+                <a:outerShdw blurRad="50800" dist="38100" dir="2700000" algn="tl" rotWithShape="0">
+                  <a:prstClr val="black">
+                    <a:alpha val="40000"/>
+                  </a:prstClr>
+                </a:outerShdw>
+              </a:effectLst>
+            </a:endParaRPr>
+          </a:p>
+          <a:p>
+            <a:r>
+              <a:rPr lang="ja-JP" altLang="en-US" sz="2800" b="1" dirty="0">
+                <a:effectLst>
+                  <a:outerShdw blurRad="50800" dist="38100" dir="2700000" algn="tl" rotWithShape="0">
+                    <a:prstClr val="black">
+                      <a:alpha val="40000"/>
+                    </a:prstClr>
+                  </a:outerShdw>
+                </a:effectLst>
+              </a:rPr>
+              <a:t>・席を離れると、サボりのバリエーション　　　</a:t>
+            </a:r>
+            <a:endParaRPr lang="en-US" altLang="ja-JP" sz="2800" b="1" dirty="0">
+              <a:effectLst>
+                <a:outerShdw blurRad="50800" dist="38100" dir="2700000" algn="tl" rotWithShape="0">
+                  <a:prstClr val="black">
+                    <a:alpha val="40000"/>
+                  </a:prstClr>
+                </a:outerShdw>
+              </a:effectLst>
+            </a:endParaRPr>
+          </a:p>
+          <a:p>
+            <a:r>
+              <a:rPr lang="ja-JP" altLang="en-US" sz="2800" b="1" dirty="0">
+                <a:effectLst>
+                  <a:outerShdw blurRad="50800" dist="38100" dir="2700000" algn="tl" rotWithShape="0">
+                    <a:prstClr val="black">
+                      <a:alpha val="40000"/>
+                    </a:prstClr>
+                  </a:outerShdw>
+                </a:effectLst>
+              </a:rPr>
+              <a:t>　が増える。</a:t>
+            </a:r>
+            <a:endParaRPr lang="en-US" altLang="ja-JP" sz="2800" b="1" dirty="0">
+              <a:effectLst>
+                <a:outerShdw blurRad="50800" dist="38100" dir="2700000" algn="tl" rotWithShape="0">
+                  <a:prstClr val="black">
+                    <a:alpha val="40000"/>
+                  </a:prstClr>
+                </a:outerShdw>
+              </a:effectLst>
+            </a:endParaRPr>
+          </a:p>
+          <a:p>
+            <a:r>
+              <a:rPr lang="ja-JP" altLang="en-US" sz="2800" b="1" dirty="0">
+                <a:effectLst>
+                  <a:outerShdw blurRad="50800" dist="38100" dir="2700000" algn="tl" rotWithShape="0">
+                    <a:prstClr val="black">
+                      <a:alpha val="40000"/>
+                    </a:prstClr>
+                  </a:outerShdw>
+                </a:effectLst>
+              </a:rPr>
+              <a:t>・タスクをすると、上司の警戒度が下がる</a:t>
+            </a:r>
+            <a:endParaRPr kumimoji="1" lang="ja-JP" altLang="en-US" sz="2800" b="1" dirty="0">
+              <a:effectLst>
+                <a:outerShdw blurRad="50800" dist="38100" dir="2700000" algn="tl" rotWithShape="0">
+                  <a:prstClr val="black">
+                    <a:alpha val="40000"/>
+                  </a:prstClr>
+                </a:outerShdw>
+              </a:effectLst>
+            </a:endParaRPr>
+          </a:p>
+        </p:txBody>
+      </p:sp>
     </p:spTree>
     <p:extLst>
       <p:ext uri="{BB962C8B-B14F-4D97-AF65-F5344CB8AC3E}">
-        <p14:creationId xmlns:p14="http://schemas.microsoft.com/office/powerpoint/2010/main" val="3829407085"/>
+        <p14:creationId xmlns:p14="http://schemas.microsoft.com/office/powerpoint/2010/main" val="639263409"/>
       </p:ext>
     </p:extLst>
   </p:cSld>

--- a/提出物関係/企画書/GC3_前期チーム制作_企画書.pptx
+++ b/提出物関係/企画書/GC3_前期チーム制作_企画書.pptx
@@ -206,7 +206,7 @@
           <a:p>
             <a:fld id="{9A46BB13-4E02-47D6-B51B-300407545168}" type="datetimeFigureOut">
               <a:rPr kumimoji="1" lang="ja-JP" altLang="en-US" smtClean="0"/>
-              <a:t>2026/4/27</a:t>
+              <a:t>2026/4/28</a:t>
             </a:fld>
             <a:endParaRPr kumimoji="1" lang="ja-JP" altLang="en-US"/>
           </a:p>
@@ -1095,7 +1095,7 @@
           <a:p>
             <a:fld id="{32CF0108-805A-4CD7-BE16-DF43657C0E0F}" type="datetimeFigureOut">
               <a:rPr kumimoji="1" lang="ja-JP" altLang="en-US" smtClean="0"/>
-              <a:t>2026/4/27</a:t>
+              <a:t>2026/4/28</a:t>
             </a:fld>
             <a:endParaRPr kumimoji="1" lang="ja-JP" altLang="en-US"/>
           </a:p>
@@ -1325,7 +1325,7 @@
           <a:p>
             <a:fld id="{32CF0108-805A-4CD7-BE16-DF43657C0E0F}" type="datetimeFigureOut">
               <a:rPr kumimoji="1" lang="ja-JP" altLang="en-US" smtClean="0"/>
-              <a:t>2026/4/27</a:t>
+              <a:t>2026/4/28</a:t>
             </a:fld>
             <a:endParaRPr kumimoji="1" lang="ja-JP" altLang="en-US"/>
           </a:p>
@@ -1565,7 +1565,7 @@
           <a:p>
             <a:fld id="{32CF0108-805A-4CD7-BE16-DF43657C0E0F}" type="datetimeFigureOut">
               <a:rPr kumimoji="1" lang="ja-JP" altLang="en-US" smtClean="0"/>
-              <a:t>2026/4/27</a:t>
+              <a:t>2026/4/28</a:t>
             </a:fld>
             <a:endParaRPr kumimoji="1" lang="ja-JP" altLang="en-US"/>
           </a:p>
@@ -1795,7 +1795,7 @@
           <a:p>
             <a:fld id="{32CF0108-805A-4CD7-BE16-DF43657C0E0F}" type="datetimeFigureOut">
               <a:rPr kumimoji="1" lang="ja-JP" altLang="en-US" smtClean="0"/>
-              <a:t>2026/4/27</a:t>
+              <a:t>2026/4/28</a:t>
             </a:fld>
             <a:endParaRPr kumimoji="1" lang="ja-JP" altLang="en-US"/>
           </a:p>
@@ -2070,7 +2070,7 @@
           <a:p>
             <a:fld id="{32CF0108-805A-4CD7-BE16-DF43657C0E0F}" type="datetimeFigureOut">
               <a:rPr kumimoji="1" lang="ja-JP" altLang="en-US" smtClean="0"/>
-              <a:t>2026/4/27</a:t>
+              <a:t>2026/4/28</a:t>
             </a:fld>
             <a:endParaRPr kumimoji="1" lang="ja-JP" altLang="en-US"/>
           </a:p>
@@ -2399,7 +2399,7 @@
           <a:p>
             <a:fld id="{32CF0108-805A-4CD7-BE16-DF43657C0E0F}" type="datetimeFigureOut">
               <a:rPr kumimoji="1" lang="ja-JP" altLang="en-US" smtClean="0"/>
-              <a:t>2026/4/27</a:t>
+              <a:t>2026/4/28</a:t>
             </a:fld>
             <a:endParaRPr kumimoji="1" lang="ja-JP" altLang="en-US"/>
           </a:p>
@@ -2875,7 +2875,7 @@
           <a:p>
             <a:fld id="{32CF0108-805A-4CD7-BE16-DF43657C0E0F}" type="datetimeFigureOut">
               <a:rPr kumimoji="1" lang="ja-JP" altLang="en-US" smtClean="0"/>
-              <a:t>2026/4/27</a:t>
+              <a:t>2026/4/28</a:t>
             </a:fld>
             <a:endParaRPr kumimoji="1" lang="ja-JP" altLang="en-US"/>
           </a:p>
@@ -3016,7 +3016,7 @@
           <a:p>
             <a:fld id="{32CF0108-805A-4CD7-BE16-DF43657C0E0F}" type="datetimeFigureOut">
               <a:rPr kumimoji="1" lang="ja-JP" altLang="en-US" smtClean="0"/>
-              <a:t>2026/4/27</a:t>
+              <a:t>2026/4/28</a:t>
             </a:fld>
             <a:endParaRPr kumimoji="1" lang="ja-JP" altLang="en-US"/>
           </a:p>
@@ -3129,7 +3129,7 @@
           <a:p>
             <a:fld id="{32CF0108-805A-4CD7-BE16-DF43657C0E0F}" type="datetimeFigureOut">
               <a:rPr kumimoji="1" lang="ja-JP" altLang="en-US" smtClean="0"/>
-              <a:t>2026/4/27</a:t>
+              <a:t>2026/4/28</a:t>
             </a:fld>
             <a:endParaRPr kumimoji="1" lang="ja-JP" altLang="en-US"/>
           </a:p>
@@ -3472,7 +3472,7 @@
           <a:p>
             <a:fld id="{32CF0108-805A-4CD7-BE16-DF43657C0E0F}" type="datetimeFigureOut">
               <a:rPr kumimoji="1" lang="ja-JP" altLang="en-US" smtClean="0"/>
-              <a:t>2026/4/27</a:t>
+              <a:t>2026/4/28</a:t>
             </a:fld>
             <a:endParaRPr kumimoji="1" lang="ja-JP" altLang="en-US"/>
           </a:p>
@@ -3760,7 +3760,7 @@
           <a:p>
             <a:fld id="{32CF0108-805A-4CD7-BE16-DF43657C0E0F}" type="datetimeFigureOut">
               <a:rPr kumimoji="1" lang="ja-JP" altLang="en-US" smtClean="0"/>
-              <a:t>2026/4/27</a:t>
+              <a:t>2026/4/28</a:t>
             </a:fld>
             <a:endParaRPr kumimoji="1" lang="ja-JP" altLang="en-US"/>
           </a:p>
@@ -4043,7 +4043,7 @@
           <a:p>
             <a:fld id="{32CF0108-805A-4CD7-BE16-DF43657C0E0F}" type="datetimeFigureOut">
               <a:rPr kumimoji="1" lang="ja-JP" altLang="en-US" smtClean="0"/>
-              <a:t>2026/4/27</a:t>
+              <a:t>2026/4/28</a:t>
             </a:fld>
             <a:endParaRPr kumimoji="1" lang="ja-JP" altLang="en-US"/>
           </a:p>
@@ -4977,6 +4977,45 @@
           </a:p>
         </p:txBody>
       </p:sp>
+      <p:pic>
+        <p:nvPicPr>
+          <p:cNvPr id="1026" name="Picture 2">
+            <a:extLst>
+              <a:ext uri="{FF2B5EF4-FFF2-40B4-BE49-F238E27FC236}">
+                <a16:creationId xmlns:a16="http://schemas.microsoft.com/office/drawing/2014/main" id="{CD9C570D-14C2-D5F5-C58F-8F785ED9BBED}"/>
+              </a:ext>
+            </a:extLst>
+          </p:cNvPr>
+          <p:cNvPicPr>
+            <a:picLocks noChangeAspect="1" noChangeArrowheads="1"/>
+          </p:cNvPicPr>
+          <p:nvPr/>
+        </p:nvPicPr>
+        <p:blipFill>
+          <a:blip r:embed="rId2"/>
+          <a:srcRect/>
+          <a:stretch/>
+        </p:blipFill>
+        <p:spPr bwMode="auto">
+          <a:xfrm>
+            <a:off x="8319549" y="3893859"/>
+            <a:ext cx="1096678" cy="1096678"/>
+          </a:xfrm>
+          <a:prstGeom prst="rect">
+            <a:avLst/>
+          </a:prstGeom>
+          <a:noFill/>
+          <a:extLst>
+            <a:ext uri="{909E8E84-426E-40DD-AFC4-6F175D3DCCD1}">
+              <a14:hiddenFill xmlns:a14="http://schemas.microsoft.com/office/drawing/2010/main">
+                <a:solidFill>
+                  <a:srgbClr val="FFFFFF"/>
+                </a:solidFill>
+              </a14:hiddenFill>
+            </a:ext>
+          </a:extLst>
+        </p:spPr>
+      </p:pic>
     </p:spTree>
     <p:extLst>
       <p:ext uri="{BB962C8B-B14F-4D97-AF65-F5344CB8AC3E}">
@@ -5620,7 +5659,7 @@
         </p:nvSpPr>
         <p:spPr>
           <a:xfrm>
-            <a:off x="0" y="2864969"/>
+            <a:off x="0" y="2094700"/>
             <a:ext cx="7471144" cy="707886"/>
           </a:xfrm>
           <a:prstGeom prst="rect">
@@ -5739,8 +5778,8 @@
         </p:nvSpPr>
         <p:spPr>
           <a:xfrm>
-            <a:off x="3283519" y="4118376"/>
-            <a:ext cx="9090592" cy="707886"/>
+            <a:off x="3735572" y="3306807"/>
+            <a:ext cx="8407177" cy="707886"/>
           </a:xfrm>
           <a:prstGeom prst="rect">
             <a:avLst/>
@@ -5861,8 +5900,8 @@
         </p:nvSpPr>
         <p:spPr>
           <a:xfrm>
-            <a:off x="5704329" y="1884323"/>
-            <a:ext cx="5308515" cy="707886"/>
+            <a:off x="0" y="4329386"/>
+            <a:ext cx="6329162" cy="707886"/>
           </a:xfrm>
           <a:prstGeom prst="rect">
             <a:avLst/>
@@ -5878,6 +5917,20 @@
             <a:pPr algn="ctr"/>
             <a:r>
               <a:rPr lang="ja-JP" altLang="en-US" sz="4000" b="1" dirty="0">
+                <a:effectLst>
+                  <a:outerShdw blurRad="50800" dist="38100" dir="2700000" algn="tl" rotWithShape="0">
+                    <a:prstClr val="black">
+                      <a:alpha val="40000"/>
+                    </a:prstClr>
+                  </a:outerShdw>
+                </a:effectLst>
+                <a:latin typeface="HGP行書体" panose="03000600000000000000" pitchFamily="66" charset="-128"/>
+                <a:ea typeface="HGP行書体" panose="03000600000000000000" pitchFamily="66" charset="-128"/>
+              </a:rPr>
+              <a:t>全ての思考を</a:t>
+            </a:r>
+            <a:r>
+              <a:rPr lang="ja-JP" altLang="en-US" sz="4000" b="1" dirty="0">
                 <a:solidFill>
                   <a:schemeClr val="accent2"/>
                 </a:solidFill>
@@ -5891,7 +5944,7 @@
                 <a:latin typeface="HGP行書体" panose="03000600000000000000" pitchFamily="66" charset="-128"/>
                 <a:ea typeface="HGP行書体" panose="03000600000000000000" pitchFamily="66" charset="-128"/>
               </a:rPr>
-              <a:t>サボる</a:t>
+              <a:t>サボり</a:t>
             </a:r>
             <a:r>
               <a:rPr lang="ja-JP" altLang="en-US" sz="4000" b="1" dirty="0">
@@ -5905,7 +5958,7 @@
                 <a:latin typeface="HGP行書体" panose="03000600000000000000" pitchFamily="66" charset="-128"/>
                 <a:ea typeface="HGP行書体" panose="03000600000000000000" pitchFamily="66" charset="-128"/>
               </a:rPr>
-              <a:t>ためなら何でもする</a:t>
+              <a:t>に向けろ</a:t>
             </a:r>
             <a:endParaRPr kumimoji="1" lang="ja-JP" altLang="en-US" sz="4000" b="1" dirty="0">
               <a:effectLst>
@@ -7593,7 +7646,7 @@
         </p:nvSpPr>
         <p:spPr>
           <a:xfrm>
-            <a:off x="418215" y="3696858"/>
+            <a:off x="418215" y="3869667"/>
             <a:ext cx="2041452" cy="584775"/>
           </a:xfrm>
           <a:prstGeom prst="rect">
@@ -7670,7 +7723,7 @@
         </p:nvSpPr>
         <p:spPr>
           <a:xfrm>
-            <a:off x="418215" y="4454442"/>
+            <a:off x="418215" y="4566125"/>
             <a:ext cx="10464799" cy="1815882"/>
           </a:xfrm>
           <a:prstGeom prst="rect">
@@ -8401,7 +8454,7 @@
         </p:nvSpPr>
         <p:spPr>
           <a:xfrm>
-            <a:off x="475428" y="4026456"/>
+            <a:off x="475428" y="4235451"/>
             <a:ext cx="2805803" cy="584775"/>
           </a:xfrm>
           <a:prstGeom prst="rect">
@@ -8502,7 +8555,7 @@
         </p:nvSpPr>
         <p:spPr>
           <a:xfrm>
-            <a:off x="700398" y="1708159"/>
+            <a:off x="700398" y="1790465"/>
             <a:ext cx="10286916" cy="2246769"/>
           </a:xfrm>
           <a:prstGeom prst="rect">
@@ -8549,7 +8602,7 @@
                   </a:outerShdw>
                 </a:effectLst>
               </a:rPr>
-              <a:t>・サボりを注意を受け​、サボりの効率が落ちる​。</a:t>
+              <a:t>・サボりの注意を受けると​、サボりの効率が落ちる​。</a:t>
             </a:r>
             <a:endParaRPr lang="en-US" altLang="ja-JP" sz="2800" b="1" dirty="0">
               <a:effectLst>
@@ -8722,8 +8775,8 @@
         </p:nvSpPr>
         <p:spPr>
           <a:xfrm>
-            <a:off x="700398" y="4676284"/>
-            <a:ext cx="7444828" cy="2246769"/>
+            <a:off x="700399" y="4953148"/>
+            <a:ext cx="10286915" cy="1384995"/>
           </a:xfrm>
           <a:prstGeom prst="rect">
             <a:avLst/>
@@ -8747,6 +8800,38 @@
                 </a:effectLst>
               </a:rPr>
               <a:t>・サボりの数をこなすと、</a:t>
+            </a:r>
+            <a:r>
+              <a:rPr lang="ja-JP" altLang="en-US" sz="2800" b="1" dirty="0">
+                <a:ln w="12700">
+                  <a:solidFill>
+                    <a:schemeClr val="tx1"/>
+                  </a:solidFill>
+                </a:ln>
+                <a:solidFill>
+                  <a:srgbClr val="FFC000"/>
+                </a:solidFill>
+                <a:effectLst>
+                  <a:outerShdw blurRad="50800" dist="38100" dir="2700000" algn="tl" rotWithShape="0">
+                    <a:prstClr val="black">
+                      <a:alpha val="40000"/>
+                    </a:prstClr>
+                  </a:outerShdw>
+                </a:effectLst>
+              </a:rPr>
+              <a:t>サボリーマン</a:t>
+            </a:r>
+            <a:r>
+              <a:rPr lang="ja-JP" altLang="en-US" sz="2800" b="1" dirty="0">
+                <a:effectLst>
+                  <a:outerShdw blurRad="50800" dist="38100" dir="2700000" algn="tl" rotWithShape="0">
+                    <a:prstClr val="black">
+                      <a:alpha val="40000"/>
+                    </a:prstClr>
+                  </a:outerShdw>
+                </a:effectLst>
+              </a:rPr>
+              <a:t>として一流になれる。​</a:t>
             </a:r>
             <a:endParaRPr lang="en-US" altLang="ja-JP" sz="2800" b="1" dirty="0">
               <a:effectLst>
@@ -8769,85 +8854,7 @@
                   </a:outerShdw>
                 </a:effectLst>
               </a:rPr>
-              <a:t>　</a:t>
-            </a:r>
-            <a:r>
-              <a:rPr lang="ja-JP" altLang="en-US" sz="2800" b="1" dirty="0">
-                <a:ln w="12700">
-                  <a:solidFill>
-                    <a:schemeClr val="tx1"/>
-                  </a:solidFill>
-                </a:ln>
-                <a:solidFill>
-                  <a:srgbClr val="FFC000"/>
-                </a:solidFill>
-                <a:effectLst>
-                  <a:outerShdw blurRad="50800" dist="38100" dir="2700000" algn="tl" rotWithShape="0">
-                    <a:prstClr val="black">
-                      <a:alpha val="40000"/>
-                    </a:prstClr>
-                  </a:outerShdw>
-                </a:effectLst>
-              </a:rPr>
-              <a:t>サボリーマン</a:t>
-            </a:r>
-            <a:r>
-              <a:rPr lang="ja-JP" altLang="en-US" sz="2800" b="1" dirty="0">
-                <a:effectLst>
-                  <a:outerShdw blurRad="50800" dist="38100" dir="2700000" algn="tl" rotWithShape="0">
-                    <a:prstClr val="black">
-                      <a:alpha val="40000"/>
-                    </a:prstClr>
-                  </a:outerShdw>
-                </a:effectLst>
-              </a:rPr>
-              <a:t>として一流になれる。​</a:t>
-            </a:r>
-            <a:endParaRPr lang="en-US" altLang="ja-JP" sz="2800" b="1" dirty="0">
-              <a:effectLst>
-                <a:outerShdw blurRad="50800" dist="38100" dir="2700000" algn="tl" rotWithShape="0">
-                  <a:prstClr val="black">
-                    <a:alpha val="40000"/>
-                  </a:prstClr>
-                </a:outerShdw>
-              </a:effectLst>
-            </a:endParaRPr>
-          </a:p>
-          <a:p>
-            <a:r>
-              <a:rPr lang="ja-JP" altLang="en-US" sz="2800" b="1" dirty="0">
-                <a:effectLst>
-                  <a:outerShdw blurRad="50800" dist="38100" dir="2700000" algn="tl" rotWithShape="0">
-                    <a:prstClr val="black">
-                      <a:alpha val="40000"/>
-                    </a:prstClr>
-                  </a:outerShdw>
-                </a:effectLst>
-              </a:rPr>
-              <a:t>・席を離れると、サボりのバリエーション　　　</a:t>
-            </a:r>
-            <a:endParaRPr lang="en-US" altLang="ja-JP" sz="2800" b="1" dirty="0">
-              <a:effectLst>
-                <a:outerShdw blurRad="50800" dist="38100" dir="2700000" algn="tl" rotWithShape="0">
-                  <a:prstClr val="black">
-                    <a:alpha val="40000"/>
-                  </a:prstClr>
-                </a:outerShdw>
-              </a:effectLst>
-            </a:endParaRPr>
-          </a:p>
-          <a:p>
-            <a:r>
-              <a:rPr lang="ja-JP" altLang="en-US" sz="2800" b="1" dirty="0">
-                <a:effectLst>
-                  <a:outerShdw blurRad="50800" dist="38100" dir="2700000" algn="tl" rotWithShape="0">
-                    <a:prstClr val="black">
-                      <a:alpha val="40000"/>
-                    </a:prstClr>
-                  </a:outerShdw>
-                </a:effectLst>
-              </a:rPr>
-              <a:t>　が増える。</a:t>
+              <a:t>・席を離れると、サボりのバリエーションが増える。</a:t>
             </a:r>
             <a:endParaRPr lang="en-US" altLang="ja-JP" sz="2800" b="1" dirty="0">
               <a:effectLst>

--- a/提出物関係/企画書/GC3_前期チーム制作_企画書.pptx
+++ b/提出物関係/企画書/GC3_前期チーム制作_企画書.pptx
@@ -206,7 +206,7 @@
           <a:p>
             <a:fld id="{9A46BB13-4E02-47D6-B51B-300407545168}" type="datetimeFigureOut">
               <a:rPr kumimoji="1" lang="ja-JP" altLang="en-US" smtClean="0"/>
-              <a:t>2026/4/28</a:t>
+              <a:t>2026/7/10</a:t>
             </a:fld>
             <a:endParaRPr kumimoji="1" lang="ja-JP" altLang="en-US"/>
           </a:p>
@@ -1095,7 +1095,7 @@
           <a:p>
             <a:fld id="{32CF0108-805A-4CD7-BE16-DF43657C0E0F}" type="datetimeFigureOut">
               <a:rPr kumimoji="1" lang="ja-JP" altLang="en-US" smtClean="0"/>
-              <a:t>2026/4/28</a:t>
+              <a:t>2026/7/10</a:t>
             </a:fld>
             <a:endParaRPr kumimoji="1" lang="ja-JP" altLang="en-US"/>
           </a:p>
@@ -1325,7 +1325,7 @@
           <a:p>
             <a:fld id="{32CF0108-805A-4CD7-BE16-DF43657C0E0F}" type="datetimeFigureOut">
               <a:rPr kumimoji="1" lang="ja-JP" altLang="en-US" smtClean="0"/>
-              <a:t>2026/4/28</a:t>
+              <a:t>2026/7/10</a:t>
             </a:fld>
             <a:endParaRPr kumimoji="1" lang="ja-JP" altLang="en-US"/>
           </a:p>
@@ -1565,7 +1565,7 @@
           <a:p>
             <a:fld id="{32CF0108-805A-4CD7-BE16-DF43657C0E0F}" type="datetimeFigureOut">
               <a:rPr kumimoji="1" lang="ja-JP" altLang="en-US" smtClean="0"/>
-              <a:t>2026/4/28</a:t>
+              <a:t>2026/7/10</a:t>
             </a:fld>
             <a:endParaRPr kumimoji="1" lang="ja-JP" altLang="en-US"/>
           </a:p>
@@ -1795,7 +1795,7 @@
           <a:p>
             <a:fld id="{32CF0108-805A-4CD7-BE16-DF43657C0E0F}" type="datetimeFigureOut">
               <a:rPr kumimoji="1" lang="ja-JP" altLang="en-US" smtClean="0"/>
-              <a:t>2026/4/28</a:t>
+              <a:t>2026/7/10</a:t>
             </a:fld>
             <a:endParaRPr kumimoji="1" lang="ja-JP" altLang="en-US"/>
           </a:p>
@@ -2070,7 +2070,7 @@
           <a:p>
             <a:fld id="{32CF0108-805A-4CD7-BE16-DF43657C0E0F}" type="datetimeFigureOut">
               <a:rPr kumimoji="1" lang="ja-JP" altLang="en-US" smtClean="0"/>
-              <a:t>2026/4/28</a:t>
+              <a:t>2026/7/10</a:t>
             </a:fld>
             <a:endParaRPr kumimoji="1" lang="ja-JP" altLang="en-US"/>
           </a:p>
@@ -2399,7 +2399,7 @@
           <a:p>
             <a:fld id="{32CF0108-805A-4CD7-BE16-DF43657C0E0F}" type="datetimeFigureOut">
               <a:rPr kumimoji="1" lang="ja-JP" altLang="en-US" smtClean="0"/>
-              <a:t>2026/4/28</a:t>
+              <a:t>2026/7/10</a:t>
             </a:fld>
             <a:endParaRPr kumimoji="1" lang="ja-JP" altLang="en-US"/>
           </a:p>
@@ -2875,7 +2875,7 @@
           <a:p>
             <a:fld id="{32CF0108-805A-4CD7-BE16-DF43657C0E0F}" type="datetimeFigureOut">
               <a:rPr kumimoji="1" lang="ja-JP" altLang="en-US" smtClean="0"/>
-              <a:t>2026/4/28</a:t>
+              <a:t>2026/7/10</a:t>
             </a:fld>
             <a:endParaRPr kumimoji="1" lang="ja-JP" altLang="en-US"/>
           </a:p>
@@ -3016,7 +3016,7 @@
           <a:p>
             <a:fld id="{32CF0108-805A-4CD7-BE16-DF43657C0E0F}" type="datetimeFigureOut">
               <a:rPr kumimoji="1" lang="ja-JP" altLang="en-US" smtClean="0"/>
-              <a:t>2026/4/28</a:t>
+              <a:t>2026/7/10</a:t>
             </a:fld>
             <a:endParaRPr kumimoji="1" lang="ja-JP" altLang="en-US"/>
           </a:p>
@@ -3129,7 +3129,7 @@
           <a:p>
             <a:fld id="{32CF0108-805A-4CD7-BE16-DF43657C0E0F}" type="datetimeFigureOut">
               <a:rPr kumimoji="1" lang="ja-JP" altLang="en-US" smtClean="0"/>
-              <a:t>2026/4/28</a:t>
+              <a:t>2026/7/10</a:t>
             </a:fld>
             <a:endParaRPr kumimoji="1" lang="ja-JP" altLang="en-US"/>
           </a:p>
@@ -3472,7 +3472,7 @@
           <a:p>
             <a:fld id="{32CF0108-805A-4CD7-BE16-DF43657C0E0F}" type="datetimeFigureOut">
               <a:rPr kumimoji="1" lang="ja-JP" altLang="en-US" smtClean="0"/>
-              <a:t>2026/4/28</a:t>
+              <a:t>2026/7/10</a:t>
             </a:fld>
             <a:endParaRPr kumimoji="1" lang="ja-JP" altLang="en-US"/>
           </a:p>
@@ -3760,7 +3760,7 @@
           <a:p>
             <a:fld id="{32CF0108-805A-4CD7-BE16-DF43657C0E0F}" type="datetimeFigureOut">
               <a:rPr kumimoji="1" lang="ja-JP" altLang="en-US" smtClean="0"/>
-              <a:t>2026/4/28</a:t>
+              <a:t>2026/7/10</a:t>
             </a:fld>
             <a:endParaRPr kumimoji="1" lang="ja-JP" altLang="en-US"/>
           </a:p>
@@ -4043,7 +4043,7 @@
           <a:p>
             <a:fld id="{32CF0108-805A-4CD7-BE16-DF43657C0E0F}" type="datetimeFigureOut">
               <a:rPr kumimoji="1" lang="ja-JP" altLang="en-US" smtClean="0"/>
-              <a:t>2026/4/28</a:t>
+              <a:t>2026/7/10</a:t>
             </a:fld>
             <a:endParaRPr kumimoji="1" lang="ja-JP" altLang="en-US"/>
           </a:p>
@@ -4929,42 +4929,6 @@
           </a:p>
           <a:p>
             <a:pPr algn="ctr"/>
-            <a:r>
-              <a:rPr lang="en-US" altLang="ja-JP" sz="2000" b="1" dirty="0">
-                <a:effectLst>
-                  <a:outerShdw blurRad="50800" dist="38100" dir="2700000" algn="tl" rotWithShape="0">
-                    <a:prstClr val="black">
-                      <a:alpha val="40000"/>
-                    </a:prstClr>
-                  </a:outerShdw>
-                </a:effectLst>
-              </a:rPr>
-              <a:t>(</a:t>
-            </a:r>
-            <a:r>
-              <a:rPr lang="ja-JP" altLang="en-US" sz="2000" b="1" dirty="0">
-                <a:effectLst>
-                  <a:outerShdw blurRad="50800" dist="38100" dir="2700000" algn="tl" rotWithShape="0">
-                    <a:prstClr val="black">
-                      <a:alpha val="40000"/>
-                    </a:prstClr>
-                  </a:outerShdw>
-                </a:effectLst>
-              </a:rPr>
-              <a:t>出席番号順</a:t>
-            </a:r>
-            <a:r>
-              <a:rPr lang="en-US" altLang="ja-JP" sz="2000" b="1" dirty="0">
-                <a:effectLst>
-                  <a:outerShdw blurRad="50800" dist="38100" dir="2700000" algn="tl" rotWithShape="0">
-                    <a:prstClr val="black">
-                      <a:alpha val="40000"/>
-                    </a:prstClr>
-                  </a:outerShdw>
-                </a:effectLst>
-              </a:rPr>
-              <a:t>)</a:t>
-            </a:r>
             <a:endParaRPr kumimoji="1" lang="ja-JP" altLang="en-US" sz="2000" b="1" dirty="0">
               <a:effectLst>
                 <a:outerShdw blurRad="50800" dist="38100" dir="2700000" algn="tl" rotWithShape="0">
@@ -6720,8 +6684,8 @@
         </p:nvSpPr>
         <p:spPr>
           <a:xfrm>
-            <a:off x="1451331" y="6273225"/>
-            <a:ext cx="9289338" cy="584775"/>
+            <a:off x="387399" y="6273225"/>
+            <a:ext cx="11570765" cy="584775"/>
           </a:xfrm>
           <a:prstGeom prst="rect">
             <a:avLst/>
@@ -6745,8 +6709,53 @@
                   </a:outerShdw>
                 </a:effectLst>
               </a:rPr>
-              <a:t>タスクは自席やコピー機、同僚の席などでできる</a:t>
-            </a:r>
+              <a:t>タスクは</a:t>
+            </a:r>
+            <a:r>
+              <a:rPr lang="ja-JP" altLang="en-US" sz="3200" b="1" dirty="0">
+                <a:effectLst>
+                  <a:outerShdw blurRad="50800" dist="38100" dir="2700000" algn="tl" rotWithShape="0">
+                    <a:prstClr val="black">
+                      <a:alpha val="40000"/>
+                    </a:prstClr>
+                  </a:outerShdw>
+                </a:effectLst>
+              </a:rPr>
+              <a:t>自席</a:t>
+            </a:r>
+            <a:r>
+              <a:rPr kumimoji="1" lang="ja-JP" altLang="en-US" sz="3200" b="1" dirty="0">
+                <a:effectLst>
+                  <a:outerShdw blurRad="50800" dist="38100" dir="2700000" algn="tl" rotWithShape="0">
+                    <a:prstClr val="black">
+                      <a:alpha val="40000"/>
+                    </a:prstClr>
+                  </a:outerShdw>
+                </a:effectLst>
+              </a:rPr>
+              <a:t>やコピー機</a:t>
+            </a:r>
+            <a:r>
+              <a:rPr lang="ja-JP" altLang="en-US" sz="3200" b="1" dirty="0">
+                <a:effectLst>
+                  <a:outerShdw blurRad="50800" dist="38100" dir="2700000" algn="tl" rotWithShape="0">
+                    <a:prstClr val="black">
+                      <a:alpha val="40000"/>
+                    </a:prstClr>
+                  </a:outerShdw>
+                </a:effectLst>
+              </a:rPr>
+              <a:t>等、サボりは喫煙や雑誌を読むこと</a:t>
+            </a:r>
+            <a:endParaRPr kumimoji="1" lang="ja-JP" altLang="en-US" sz="3200" b="1" dirty="0">
+              <a:effectLst>
+                <a:outerShdw blurRad="50800" dist="38100" dir="2700000" algn="tl" rotWithShape="0">
+                  <a:prstClr val="black">
+                    <a:alpha val="40000"/>
+                  </a:prstClr>
+                </a:outerShdw>
+              </a:effectLst>
+            </a:endParaRPr>
           </a:p>
         </p:txBody>
       </p:sp>
